--- a/report/dist/property_shot_portfolio.pptx
+++ b/report/dist/property_shot_portfolio.pptx
@@ -2,22 +2,22 @@
 <file path=ppt/presentation.xml><?xml version="1.0" encoding="utf-8"?>
 <p:presentation xmlns:p="http://schemas.openxmlformats.org/presentationml/2006/main">
   <p:sldMasterIdLst>
-    <p:sldMasterId xmlns:r="http://schemas.openxmlformats.org/officeDocument/2006/relationships" id="2147483648" r:id="R126dd50f012749a6"/>
+    <p:sldMasterId xmlns:r="http://schemas.openxmlformats.org/officeDocument/2006/relationships" id="2147483648" r:id="Rd17a9d72551c45d9"/>
   </p:sldMasterIdLst>
   <p:notesMasterIdLst>
-    <p:notesMasterId xmlns:r="http://schemas.openxmlformats.org/officeDocument/2006/relationships" r:id="R05fe1985bee34edb"/>
+    <p:notesMasterId xmlns:r="http://schemas.openxmlformats.org/officeDocument/2006/relationships" r:id="Rffdef7b6555e42d1"/>
   </p:notesMasterIdLst>
   <p:sldIdLst>
-    <p:sldId xmlns:r="http://schemas.openxmlformats.org/officeDocument/2006/relationships" id="256" r:id="R786a8b96e8e24a12"/>
-    <p:sldId xmlns:r="http://schemas.openxmlformats.org/officeDocument/2006/relationships" id="257" r:id="Rac13d281afee4c46"/>
-    <p:sldId xmlns:r="http://schemas.openxmlformats.org/officeDocument/2006/relationships" id="258" r:id="R2ac9227231414521"/>
-    <p:sldId xmlns:r="http://schemas.openxmlformats.org/officeDocument/2006/relationships" id="259" r:id="Rfd125b9d062c48c0"/>
-    <p:sldId xmlns:r="http://schemas.openxmlformats.org/officeDocument/2006/relationships" id="260" r:id="R19918ea61a3e4c9e"/>
-    <p:sldId xmlns:r="http://schemas.openxmlformats.org/officeDocument/2006/relationships" id="261" r:id="R3f574c71c4e441c9"/>
-    <p:sldId xmlns:r="http://schemas.openxmlformats.org/officeDocument/2006/relationships" id="262" r:id="Ra3343ec573e04acf"/>
-    <p:sldId xmlns:r="http://schemas.openxmlformats.org/officeDocument/2006/relationships" id="263" r:id="Rcc76812d39464282"/>
-    <p:sldId xmlns:r="http://schemas.openxmlformats.org/officeDocument/2006/relationships" id="264" r:id="R859112319c384a02"/>
-    <p:sldId xmlns:r="http://schemas.openxmlformats.org/officeDocument/2006/relationships" id="265" r:id="R85c24c4021584919"/>
+    <p:sldId xmlns:r="http://schemas.openxmlformats.org/officeDocument/2006/relationships" id="256" r:id="R544242b705664f5b"/>
+    <p:sldId xmlns:r="http://schemas.openxmlformats.org/officeDocument/2006/relationships" id="257" r:id="R374cb351878c4c4c"/>
+    <p:sldId xmlns:r="http://schemas.openxmlformats.org/officeDocument/2006/relationships" id="258" r:id="R028452b4de004d5a"/>
+    <p:sldId xmlns:r="http://schemas.openxmlformats.org/officeDocument/2006/relationships" id="259" r:id="Reb236ac35cc04c9e"/>
+    <p:sldId xmlns:r="http://schemas.openxmlformats.org/officeDocument/2006/relationships" id="260" r:id="R6ae0c556ab924742"/>
+    <p:sldId xmlns:r="http://schemas.openxmlformats.org/officeDocument/2006/relationships" id="261" r:id="R0a28b17944d14fbe"/>
+    <p:sldId xmlns:r="http://schemas.openxmlformats.org/officeDocument/2006/relationships" id="262" r:id="Rc5f704abf3114f10"/>
+    <p:sldId xmlns:r="http://schemas.openxmlformats.org/officeDocument/2006/relationships" id="263" r:id="Re4ceca5c8fc54bfa"/>
+    <p:sldId xmlns:r="http://schemas.openxmlformats.org/officeDocument/2006/relationships" id="264" r:id="R43e5e5642e874026"/>
+    <p:sldId xmlns:r="http://schemas.openxmlformats.org/officeDocument/2006/relationships" id="265" r:id="R952eb11cf59d4a1c"/>
   </p:sldIdLst>
   <p:sldSz cx="7562850" cy="10696575"/>
   <p:notesSz cx="6858000" cy="9144000"/>
@@ -1229,7 +1229,7 @@
   </p:cSld>
   <p:clrMap bg1="lt1" tx1="dk1" bg2="lt2" tx2="dk2" accent1="accent1" accent2="accent2" accent3="accent3" accent4="accent4" accent5="accent5" accent6="accent6" hlink="hlink" folHlink="folHlink"/>
   <p:sldLayoutIdLst>
-    <p:sldLayoutId xmlns:r="http://schemas.openxmlformats.org/officeDocument/2006/relationships" id="2147483649" r:id="R2c7b66cd4df2458b"/>
+    <p:sldLayoutId xmlns:r="http://schemas.openxmlformats.org/officeDocument/2006/relationships" id="2147483649" r:id="R8b694fa4c8874d6b"/>
   </p:sldLayoutIdLst>
   <p:txStyles>
     <p:titleStyle>
@@ -1777,10 +1777,10 @@
       </p:grpSpPr>
       <p:sp>
         <p:nvSpPr>
-          <p:cNvPr id="9" name="cover-accent">
-            <a:extLst xmlns:a="http://schemas.openxmlformats.org/drawingml/2006/main">
-              <a:ext uri="{FF2B5EF4-FFF2-40B4-BE49-F238E27FC236}">
-                <a16:creationId xmlns:a16="http://schemas.microsoft.com/office/drawing/2014/main" id="{6DE6BCD3-204F-4EF7-A2A4-59C683D58096}"/>
+          <p:cNvPr id="8" name="cover-accent">
+            <a:extLst xmlns:a="http://schemas.openxmlformats.org/drawingml/2006/main">
+              <a:ext uri="{FF2B5EF4-FFF2-40B4-BE49-F238E27FC236}">
+                <a16:creationId xmlns:a16="http://schemas.microsoft.com/office/drawing/2014/main" id="{50BBF51F-427F-49C0-A7E5-951D531D5F79}"/>
               </a:ext>
             </a:extLst>
           </p:cNvPr>
@@ -1811,7 +1811,7 @@
           <p:cNvPr id="2" name="cover-kicker">
             <a:extLst xmlns:a="http://schemas.openxmlformats.org/drawingml/2006/main">
               <a:ext uri="{FF2B5EF4-FFF2-40B4-BE49-F238E27FC236}">
-                <a16:creationId xmlns:a16="http://schemas.microsoft.com/office/drawing/2014/main" id="{9651352D-E41D-449F-8452-9A243849266F}"/>
+                <a16:creationId xmlns:a16="http://schemas.microsoft.com/office/drawing/2014/main" id="{F6301586-5A6A-4861-8D91-C71A50FF434E}"/>
               </a:ext>
             </a:extLst>
           </p:cNvPr>
@@ -1873,7 +1873,7 @@
           <p:cNvPr id="3" name="cover-title">
             <a:extLst xmlns:a="http://schemas.openxmlformats.org/drawingml/2006/main">
               <a:ext uri="{FF2B5EF4-FFF2-40B4-BE49-F238E27FC236}">
-                <a16:creationId xmlns:a16="http://schemas.microsoft.com/office/drawing/2014/main" id="{4AFA5C76-4AE2-40B0-9EF5-D3F6027EBCF7}"/>
+                <a16:creationId xmlns:a16="http://schemas.microsoft.com/office/drawing/2014/main" id="{1C45E8B9-5423-4253-B0E4-5550A32F978F}"/>
               </a:ext>
             </a:extLst>
           </p:cNvPr>
@@ -1935,7 +1935,7 @@
           <p:cNvPr id="4" name="cover-rule">
             <a:extLst xmlns:a="http://schemas.openxmlformats.org/drawingml/2006/main">
               <a:ext uri="{FF2B5EF4-FFF2-40B4-BE49-F238E27FC236}">
-                <a16:creationId xmlns:a16="http://schemas.microsoft.com/office/drawing/2014/main" id="{4B09FC5D-1AA8-4684-B271-366A71569DFC}"/>
+                <a16:creationId xmlns:a16="http://schemas.microsoft.com/office/drawing/2014/main" id="{DFEDA4EE-17A3-4EF4-A73A-FD9E133BF92D}"/>
               </a:ext>
             </a:extLst>
           </p:cNvPr>
@@ -1961,83 +1961,21 @@
           </a:ln>
         </p:spPr>
       </p:sp>
-      <p:sp>
-        <p:nvSpPr>
-          <p:cNvPr id="5" name="cover-description">
-            <a:extLst xmlns:a="http://schemas.openxmlformats.org/drawingml/2006/main">
-              <a:ext uri="{FF2B5EF4-FFF2-40B4-BE49-F238E27FC236}">
-                <a16:creationId xmlns:a16="http://schemas.microsoft.com/office/drawing/2014/main" id="{DF0FB64D-D985-4A6B-80DE-C7D38EEBCBDE}"/>
-              </a:ext>
-            </a:extLst>
-          </p:cNvPr>
-          <p:cNvSpPr>
-            <a:spLocks xmlns:a="http://schemas.openxmlformats.org/drawingml/2006/main" noGrp="1"/>
-          </p:cNvSpPr>
-          <p:nvPr/>
-        </p:nvSpPr>
-        <p:spPr>
-          <a:xfrm xmlns:a="http://schemas.openxmlformats.org/drawingml/2006/main">
-            <a:off x="742950" y="4552950"/>
-            <a:ext cx="3238500" cy="1524000"/>
-          </a:xfrm>
-          <a:prstGeom xmlns:a="http://schemas.openxmlformats.org/drawingml/2006/main" prst="rect">
-            <a:avLst/>
-          </a:prstGeom>
-          <a:noFill xmlns:a="http://schemas.openxmlformats.org/drawingml/2006/main"/>
-          <a:ln xmlns:a="http://schemas.openxmlformats.org/drawingml/2006/main" w="0">
-            <a:noFill/>
-            <a:prstDash val="solid"/>
-          </a:ln>
-        </p:spPr>
-        <p:txBody>
-          <a:bodyPr xmlns:a="http://schemas.openxmlformats.org/drawingml/2006/main" lIns="0" tIns="0" rIns="0" bIns="0" anchor="t">
-            <a:normAutofit fontScale="100000"/>
-          </a:bodyPr>
-          <a:lstStyle xmlns:a="http://schemas.openxmlformats.org/drawingml/2006/main"/>
-          <a:p xmlns:a="http://schemas.openxmlformats.org/drawingml/2006/main">
-            <a:pPr algn="l">
-              <a:lnSpc>
-                <a:spcPct val="125000"/>
-              </a:lnSpc>
-              <a:buNone/>
-              <a:defRPr sz="1650" b="0">
-                <a:solidFill>
-                  <a:srgbClr val="607477"/>
-                </a:solidFill>
-                <a:latin typeface="NanumGothic"/>
-                <a:ea typeface="NanumGothic"/>
-                <a:cs typeface="NanumGothic"/>
-              </a:defRPr>
-            </a:pPr>
-            <a:r>
-              <a:rPr sz="1650" b="0">
-                <a:solidFill>
-                  <a:srgbClr val="607477"/>
-                </a:solidFill>
-                <a:latin typeface="NanumGothic"/>
-                <a:ea typeface="NanumGothic"/>
-                <a:cs typeface="NanumGothic"/>
-              </a:rPr>
-              <a:t>게임 디렉팅, AI 오케스트레이션, 검증 가능한 제품 제작</a:t>
-            </a:r>
-          </a:p>
-        </p:txBody>
-      </p:sp>
       <p:pic>
         <p:nvPicPr>
-          <p:cNvPr id="14" name=""/>
+          <p:cNvPr id="12" name=""/>
           <p:cNvPicPr>
             <a:picLocks xmlns:a="http://schemas.openxmlformats.org/drawingml/2006/main" noChangeAspect="1"/>
           </p:cNvPicPr>
           <p:nvPr/>
         </p:nvPicPr>
         <p:blipFill>
-          <a:blip xmlns:r="http://schemas.openxmlformats.org/officeDocument/2006/relationships" xmlns:a="http://schemas.openxmlformats.org/drawingml/2006/main" r:embed="R712076002f104047"/>
+          <a:blip xmlns:r="http://schemas.openxmlformats.org/officeDocument/2006/relationships" xmlns:a="http://schemas.openxmlformats.org/drawingml/2006/main" r:embed="R9af581bc39fa4806"/>
           <a:stretch xmlns:a="http://schemas.openxmlformats.org/drawingml/2006/main"/>
         </p:blipFill>
         <p:spPr>
           <a:xfrm xmlns:a="http://schemas.openxmlformats.org/drawingml/2006/main">
-            <a:off x="4845900" y="4457700"/>
+            <a:off x="3055200" y="4457700"/>
             <a:ext cx="1452450" cy="3143250"/>
           </a:xfrm>
           <a:prstGeom xmlns:a="http://schemas.openxmlformats.org/drawingml/2006/main" prst="roundRect">
@@ -2049,10 +1987,10 @@
       </p:pic>
       <p:sp>
         <p:nvSpPr>
-          <p:cNvPr id="7" name="cover-meta">
-            <a:extLst xmlns:a="http://schemas.openxmlformats.org/drawingml/2006/main">
-              <a:ext uri="{FF2B5EF4-FFF2-40B4-BE49-F238E27FC236}">
-                <a16:creationId xmlns:a16="http://schemas.microsoft.com/office/drawing/2014/main" id="{79D1B24B-D6C3-4228-96F5-85CD1C1481A1}"/>
+          <p:cNvPr id="6" name="cover-meta">
+            <a:extLst xmlns:a="http://schemas.openxmlformats.org/drawingml/2006/main">
+              <a:ext uri="{FF2B5EF4-FFF2-40B4-BE49-F238E27FC236}">
+                <a16:creationId xmlns:a16="http://schemas.microsoft.com/office/drawing/2014/main" id="{D775BC45-F191-44DE-8112-82AD67B5FD3A}"/>
               </a:ext>
             </a:extLst>
           </p:cNvPr>
@@ -2138,10 +2076,10 @@
       </p:sp>
       <p:sp>
         <p:nvSpPr>
-          <p:cNvPr id="8" name="cover-page">
-            <a:extLst xmlns:a="http://schemas.openxmlformats.org/drawingml/2006/main">
-              <a:ext uri="{FF2B5EF4-FFF2-40B4-BE49-F238E27FC236}">
-                <a16:creationId xmlns:a16="http://schemas.microsoft.com/office/drawing/2014/main" id="{A9AA9630-E432-4243-8624-9519E7D719B3}"/>
+          <p:cNvPr id="7" name="cover-page">
+            <a:extLst xmlns:a="http://schemas.openxmlformats.org/drawingml/2006/main">
+              <a:ext uri="{FF2B5EF4-FFF2-40B4-BE49-F238E27FC236}">
+                <a16:creationId xmlns:a16="http://schemas.microsoft.com/office/drawing/2014/main" id="{CA302816-834E-4438-9087-E2528CB31EBF}"/>
               </a:ext>
             </a:extLst>
           </p:cNvPr>
@@ -2201,7 +2139,7 @@
     </p:spTree>
     <p:extLst>
       <p:ext uri="{BB962C8B-B14F-4D97-AF65-F5344CB8AC3E}">
-        <p14:creationId xmlns:p14="http://schemas.microsoft.com/office/powerpoint/2010/main" val="1139885551"/>
+        <p14:creationId xmlns:p14="http://schemas.microsoft.com/office/powerpoint/2010/main" val="1295592955"/>
       </p:ext>
     </p:extLst>
   </p:cSld>
@@ -2232,7 +2170,7 @@
           <p:cNvPr id="6" name="running-label">
             <a:extLst xmlns:a="http://schemas.openxmlformats.org/drawingml/2006/main">
               <a:ext uri="{FF2B5EF4-FFF2-40B4-BE49-F238E27FC236}">
-                <a16:creationId xmlns:a16="http://schemas.microsoft.com/office/drawing/2014/main" id="{E3682DCE-A075-4E24-8FF3-9FC7DF3C55C0}"/>
+                <a16:creationId xmlns:a16="http://schemas.microsoft.com/office/drawing/2014/main" id="{F62B1C14-CDD1-4910-862B-605CBC1D2937}"/>
               </a:ext>
             </a:extLst>
           </p:cNvPr>
@@ -2294,7 +2232,7 @@
           <p:cNvPr id="2" name="page-number">
             <a:extLst xmlns:a="http://schemas.openxmlformats.org/drawingml/2006/main">
               <a:ext uri="{FF2B5EF4-FFF2-40B4-BE49-F238E27FC236}">
-                <a16:creationId xmlns:a16="http://schemas.microsoft.com/office/drawing/2014/main" id="{0BA3FD0C-EBF7-457B-98FC-1AD386AB03DD}"/>
+                <a16:creationId xmlns:a16="http://schemas.microsoft.com/office/drawing/2014/main" id="{1F7726A7-E048-409E-80C2-2438B2D4E822}"/>
               </a:ext>
             </a:extLst>
           </p:cNvPr>
@@ -2356,7 +2294,7 @@
           <p:cNvPr id="3" name="header-rule">
             <a:extLst xmlns:a="http://schemas.openxmlformats.org/drawingml/2006/main">
               <a:ext uri="{FF2B5EF4-FFF2-40B4-BE49-F238E27FC236}">
-                <a16:creationId xmlns:a16="http://schemas.microsoft.com/office/drawing/2014/main" id="{1AB9450B-8A46-4BD4-971E-60D42C6B055F}"/>
+                <a16:creationId xmlns:a16="http://schemas.microsoft.com/office/drawing/2014/main" id="{80F33A76-2463-4B5F-B9A2-BF6E8FEE9A7E}"/>
               </a:ext>
             </a:extLst>
           </p:cNvPr>
@@ -2387,7 +2325,7 @@
           <p:cNvPr id="4" name="slide-title">
             <a:extLst xmlns:a="http://schemas.openxmlformats.org/drawingml/2006/main">
               <a:ext uri="{FF2B5EF4-FFF2-40B4-BE49-F238E27FC236}">
-                <a16:creationId xmlns:a16="http://schemas.microsoft.com/office/drawing/2014/main" id="{4460E15E-4839-4653-94B5-2C995C219028}"/>
+                <a16:creationId xmlns:a16="http://schemas.microsoft.com/office/drawing/2014/main" id="{10C68CD2-0F8D-4943-9F33-6DEC1A3DF68F}"/>
               </a:ext>
             </a:extLst>
           </p:cNvPr>
@@ -2449,7 +2387,7 @@
           <p:cNvPr id="5" name="bullets-140">
             <a:extLst xmlns:a="http://schemas.openxmlformats.org/drawingml/2006/main">
               <a:ext uri="{FF2B5EF4-FFF2-40B4-BE49-F238E27FC236}">
-                <a16:creationId xmlns:a16="http://schemas.microsoft.com/office/drawing/2014/main" id="{5D96BEFC-76CC-4718-9BD1-BF1467000870}"/>
+                <a16:creationId xmlns:a16="http://schemas.microsoft.com/office/drawing/2014/main" id="{5DB8546B-9055-43E3-A5B2-A1A808278D9A}"/>
               </a:ext>
             </a:extLst>
           </p:cNvPr>
@@ -2632,7 +2570,7 @@
     </p:spTree>
     <p:extLst>
       <p:ext uri="{BB962C8B-B14F-4D97-AF65-F5344CB8AC3E}">
-        <p14:creationId xmlns:p14="http://schemas.microsoft.com/office/powerpoint/2010/main" val="859276236"/>
+        <p14:creationId xmlns:p14="http://schemas.microsoft.com/office/powerpoint/2010/main" val="2089996272"/>
       </p:ext>
     </p:extLst>
   </p:cSld>
@@ -2663,7 +2601,7 @@
           <p:cNvPr id="28" name="running-label">
             <a:extLst xmlns:a="http://schemas.openxmlformats.org/drawingml/2006/main">
               <a:ext uri="{FF2B5EF4-FFF2-40B4-BE49-F238E27FC236}">
-                <a16:creationId xmlns:a16="http://schemas.microsoft.com/office/drawing/2014/main" id="{86E5B507-9403-4CC6-9C90-C494384D75C2}"/>
+                <a16:creationId xmlns:a16="http://schemas.microsoft.com/office/drawing/2014/main" id="{C4372462-B7A5-4B87-960C-D529D12F4ED5}"/>
               </a:ext>
             </a:extLst>
           </p:cNvPr>
@@ -2725,7 +2663,7 @@
           <p:cNvPr id="2" name="page-number">
             <a:extLst xmlns:a="http://schemas.openxmlformats.org/drawingml/2006/main">
               <a:ext uri="{FF2B5EF4-FFF2-40B4-BE49-F238E27FC236}">
-                <a16:creationId xmlns:a16="http://schemas.microsoft.com/office/drawing/2014/main" id="{95B9B850-EC0E-47D4-93C7-D248A38038BE}"/>
+                <a16:creationId xmlns:a16="http://schemas.microsoft.com/office/drawing/2014/main" id="{374A17D5-E401-44DF-957C-58E5B952616E}"/>
               </a:ext>
             </a:extLst>
           </p:cNvPr>
@@ -2787,7 +2725,7 @@
           <p:cNvPr id="3" name="header-rule">
             <a:extLst xmlns:a="http://schemas.openxmlformats.org/drawingml/2006/main">
               <a:ext uri="{FF2B5EF4-FFF2-40B4-BE49-F238E27FC236}">
-                <a16:creationId xmlns:a16="http://schemas.microsoft.com/office/drawing/2014/main" id="{DEBEF830-3C77-4C25-B844-C2E42CE3070A}"/>
+                <a16:creationId xmlns:a16="http://schemas.microsoft.com/office/drawing/2014/main" id="{3C310F56-6488-4E77-B216-548114ADCDF7}"/>
               </a:ext>
             </a:extLst>
           </p:cNvPr>
@@ -2818,7 +2756,7 @@
           <p:cNvPr id="4" name="slide-title">
             <a:extLst xmlns:a="http://schemas.openxmlformats.org/drawingml/2006/main">
               <a:ext uri="{FF2B5EF4-FFF2-40B4-BE49-F238E27FC236}">
-                <a16:creationId xmlns:a16="http://schemas.microsoft.com/office/drawing/2014/main" id="{75560A71-90F5-4CEC-BF43-28EEA66FE912}"/>
+                <a16:creationId xmlns:a16="http://schemas.microsoft.com/office/drawing/2014/main" id="{9860D026-4ECC-4E95-9DE9-BFE048F88E1D}"/>
               </a:ext>
             </a:extLst>
           </p:cNvPr>
@@ -2880,7 +2818,7 @@
           <p:cNvPr id="5" name="paragraph-140">
             <a:extLst xmlns:a="http://schemas.openxmlformats.org/drawingml/2006/main">
               <a:ext uri="{FF2B5EF4-FFF2-40B4-BE49-F238E27FC236}">
-                <a16:creationId xmlns:a16="http://schemas.microsoft.com/office/drawing/2014/main" id="{57862925-00F7-4C4D-9291-05F4B4929BB1}"/>
+                <a16:creationId xmlns:a16="http://schemas.microsoft.com/office/drawing/2014/main" id="{249B17E3-8C63-4B3E-959E-253132F72399}"/>
               </a:ext>
             </a:extLst>
           </p:cNvPr>
@@ -2946,7 +2884,7 @@
           <p:nvPr/>
         </p:nvPicPr>
         <p:blipFill>
-          <a:blip xmlns:r="http://schemas.openxmlformats.org/officeDocument/2006/relationships" xmlns:a="http://schemas.openxmlformats.org/drawingml/2006/main" r:embed="R2cb46e767ba64d16"/>
+          <a:blip xmlns:r="http://schemas.openxmlformats.org/officeDocument/2006/relationships" xmlns:a="http://schemas.openxmlformats.org/drawingml/2006/main" r:embed="Rd3f002ed14aa4cfb"/>
           <a:stretch xmlns:a="http://schemas.openxmlformats.org/drawingml/2006/main"/>
         </p:blipFill>
         <p:spPr>
@@ -2966,7 +2904,7 @@
           <p:cNvPr id="7" name="image-caption-236.96">
             <a:extLst xmlns:a="http://schemas.openxmlformats.org/drawingml/2006/main">
               <a:ext uri="{FF2B5EF4-FFF2-40B4-BE49-F238E27FC236}">
-                <a16:creationId xmlns:a16="http://schemas.microsoft.com/office/drawing/2014/main" id="{209785EA-D1EE-4CC6-9C46-2944313CFFAA}"/>
+                <a16:creationId xmlns:a16="http://schemas.microsoft.com/office/drawing/2014/main" id="{34B28FF9-41F5-4118-8624-93494284FDC6}"/>
               </a:ext>
             </a:extLst>
           </p:cNvPr>
@@ -3028,7 +2966,7 @@
           <p:cNvPr id="8" name="table-cell-620.96-0-0">
             <a:extLst xmlns:a="http://schemas.openxmlformats.org/drawingml/2006/main">
               <a:ext uri="{FF2B5EF4-FFF2-40B4-BE49-F238E27FC236}">
-                <a16:creationId xmlns:a16="http://schemas.microsoft.com/office/drawing/2014/main" id="{8B66A84E-2F59-4FEC-AAD8-9908E2A7C17F}"/>
+                <a16:creationId xmlns:a16="http://schemas.microsoft.com/office/drawing/2014/main" id="{4290C2AA-1A87-44A0-8498-745B89EDD500}"/>
               </a:ext>
             </a:extLst>
           </p:cNvPr>
@@ -3061,7 +2999,7 @@
           <p:cNvPr id="9" name="table-text-620.96-0-0">
             <a:extLst xmlns:a="http://schemas.openxmlformats.org/drawingml/2006/main">
               <a:ext uri="{FF2B5EF4-FFF2-40B4-BE49-F238E27FC236}">
-                <a16:creationId xmlns:a16="http://schemas.microsoft.com/office/drawing/2014/main" id="{C5A07985-8D3A-45AF-94C4-9FC81E3E56FD}"/>
+                <a16:creationId xmlns:a16="http://schemas.microsoft.com/office/drawing/2014/main" id="{CE994524-CC95-41CC-BAE4-1DDFF8711C8F}"/>
               </a:ext>
             </a:extLst>
           </p:cNvPr>
@@ -3123,7 +3061,7 @@
           <p:cNvPr id="10" name="table-cell-620.96-0-1">
             <a:extLst xmlns:a="http://schemas.openxmlformats.org/drawingml/2006/main">
               <a:ext uri="{FF2B5EF4-FFF2-40B4-BE49-F238E27FC236}">
-                <a16:creationId xmlns:a16="http://schemas.microsoft.com/office/drawing/2014/main" id="{22AEF182-9143-407C-8542-7B8C39A04D2E}"/>
+                <a16:creationId xmlns:a16="http://schemas.microsoft.com/office/drawing/2014/main" id="{FC076F0A-58CC-4BC0-86D7-A9D73FDFD0FA}"/>
               </a:ext>
             </a:extLst>
           </p:cNvPr>
@@ -3156,7 +3094,7 @@
           <p:cNvPr id="11" name="table-text-620.96-0-1">
             <a:extLst xmlns:a="http://schemas.openxmlformats.org/drawingml/2006/main">
               <a:ext uri="{FF2B5EF4-FFF2-40B4-BE49-F238E27FC236}">
-                <a16:creationId xmlns:a16="http://schemas.microsoft.com/office/drawing/2014/main" id="{ADC65C9C-B034-4CE8-8398-FC67F79C63DB}"/>
+                <a16:creationId xmlns:a16="http://schemas.microsoft.com/office/drawing/2014/main" id="{322A0BFF-2F4F-47B4-8351-86BC0A58143C}"/>
               </a:ext>
             </a:extLst>
           </p:cNvPr>
@@ -3218,7 +3156,7 @@
           <p:cNvPr id="12" name="table-cell-620.96-1-0">
             <a:extLst xmlns:a="http://schemas.openxmlformats.org/drawingml/2006/main">
               <a:ext uri="{FF2B5EF4-FFF2-40B4-BE49-F238E27FC236}">
-                <a16:creationId xmlns:a16="http://schemas.microsoft.com/office/drawing/2014/main" id="{3774FD7F-D19D-4311-BFAA-6A850820121F}"/>
+                <a16:creationId xmlns:a16="http://schemas.microsoft.com/office/drawing/2014/main" id="{B329B3D2-D00F-4792-A307-D7A132C6CC31}"/>
               </a:ext>
             </a:extLst>
           </p:cNvPr>
@@ -3251,7 +3189,7 @@
           <p:cNvPr id="13" name="table-text-620.96-1-0">
             <a:extLst xmlns:a="http://schemas.openxmlformats.org/drawingml/2006/main">
               <a:ext uri="{FF2B5EF4-FFF2-40B4-BE49-F238E27FC236}">
-                <a16:creationId xmlns:a16="http://schemas.microsoft.com/office/drawing/2014/main" id="{109A1828-D123-4764-A012-080D901DA9BE}"/>
+                <a16:creationId xmlns:a16="http://schemas.microsoft.com/office/drawing/2014/main" id="{82D0F57E-FEC5-4907-A662-431EB0340277}"/>
               </a:ext>
             </a:extLst>
           </p:cNvPr>
@@ -3313,7 +3251,7 @@
           <p:cNvPr id="14" name="table-cell-620.96-1-1">
             <a:extLst xmlns:a="http://schemas.openxmlformats.org/drawingml/2006/main">
               <a:ext uri="{FF2B5EF4-FFF2-40B4-BE49-F238E27FC236}">
-                <a16:creationId xmlns:a16="http://schemas.microsoft.com/office/drawing/2014/main" id="{B5D97C90-6EE1-495B-986F-75F87CDF0052}"/>
+                <a16:creationId xmlns:a16="http://schemas.microsoft.com/office/drawing/2014/main" id="{436EB3EE-EBDA-43EC-B1E4-9F11A7A6DFEE}"/>
               </a:ext>
             </a:extLst>
           </p:cNvPr>
@@ -3346,7 +3284,7 @@
           <p:cNvPr id="15" name="table-text-620.96-1-1">
             <a:extLst xmlns:a="http://schemas.openxmlformats.org/drawingml/2006/main">
               <a:ext uri="{FF2B5EF4-FFF2-40B4-BE49-F238E27FC236}">
-                <a16:creationId xmlns:a16="http://schemas.microsoft.com/office/drawing/2014/main" id="{4F4A8F7C-9D3F-47D4-AC2D-FE32FD97E871}"/>
+                <a16:creationId xmlns:a16="http://schemas.microsoft.com/office/drawing/2014/main" id="{9AA5C2C4-2D8D-47A2-95A8-53FCA27C4043}"/>
               </a:ext>
             </a:extLst>
           </p:cNvPr>
@@ -3408,7 +3346,7 @@
           <p:cNvPr id="16" name="table-cell-620.96-2-0">
             <a:extLst xmlns:a="http://schemas.openxmlformats.org/drawingml/2006/main">
               <a:ext uri="{FF2B5EF4-FFF2-40B4-BE49-F238E27FC236}">
-                <a16:creationId xmlns:a16="http://schemas.microsoft.com/office/drawing/2014/main" id="{539B3059-F0FE-46FB-BF44-E9A1948A5941}"/>
+                <a16:creationId xmlns:a16="http://schemas.microsoft.com/office/drawing/2014/main" id="{1C802286-071F-4A5E-B243-7EA2D31449CE}"/>
               </a:ext>
             </a:extLst>
           </p:cNvPr>
@@ -3441,7 +3379,7 @@
           <p:cNvPr id="17" name="table-text-620.96-2-0">
             <a:extLst xmlns:a="http://schemas.openxmlformats.org/drawingml/2006/main">
               <a:ext uri="{FF2B5EF4-FFF2-40B4-BE49-F238E27FC236}">
-                <a16:creationId xmlns:a16="http://schemas.microsoft.com/office/drawing/2014/main" id="{028775E8-01C4-48EA-9C17-3627D43D74A0}"/>
+                <a16:creationId xmlns:a16="http://schemas.microsoft.com/office/drawing/2014/main" id="{82431D6F-4AC8-45C5-9892-25F9CF0CC8F8}"/>
               </a:ext>
             </a:extLst>
           </p:cNvPr>
@@ -3503,7 +3441,7 @@
           <p:cNvPr id="18" name="table-cell-620.96-2-1">
             <a:extLst xmlns:a="http://schemas.openxmlformats.org/drawingml/2006/main">
               <a:ext uri="{FF2B5EF4-FFF2-40B4-BE49-F238E27FC236}">
-                <a16:creationId xmlns:a16="http://schemas.microsoft.com/office/drawing/2014/main" id="{077F09B5-8C9C-4D09-83D6-E2727D30B191}"/>
+                <a16:creationId xmlns:a16="http://schemas.microsoft.com/office/drawing/2014/main" id="{3611C94C-3723-44CB-BD52-2085F6E3F7E1}"/>
               </a:ext>
             </a:extLst>
           </p:cNvPr>
@@ -3536,7 +3474,7 @@
           <p:cNvPr id="19" name="table-text-620.96-2-1">
             <a:extLst xmlns:a="http://schemas.openxmlformats.org/drawingml/2006/main">
               <a:ext uri="{FF2B5EF4-FFF2-40B4-BE49-F238E27FC236}">
-                <a16:creationId xmlns:a16="http://schemas.microsoft.com/office/drawing/2014/main" id="{60CA0E9E-B4EC-4463-ABE3-B3723B349E9C}"/>
+                <a16:creationId xmlns:a16="http://schemas.microsoft.com/office/drawing/2014/main" id="{C65DC317-E3FD-43E7-A703-02067F9CBD10}"/>
               </a:ext>
             </a:extLst>
           </p:cNvPr>
@@ -3598,7 +3536,7 @@
           <p:cNvPr id="20" name="table-cell-620.96-3-0">
             <a:extLst xmlns:a="http://schemas.openxmlformats.org/drawingml/2006/main">
               <a:ext uri="{FF2B5EF4-FFF2-40B4-BE49-F238E27FC236}">
-                <a16:creationId xmlns:a16="http://schemas.microsoft.com/office/drawing/2014/main" id="{A87C7B6A-E72C-4C04-81C1-E3637FF12C0C}"/>
+                <a16:creationId xmlns:a16="http://schemas.microsoft.com/office/drawing/2014/main" id="{867F62A2-E837-4915-845D-CDE4D65ECCE8}"/>
               </a:ext>
             </a:extLst>
           </p:cNvPr>
@@ -3631,7 +3569,7 @@
           <p:cNvPr id="21" name="table-text-620.96-3-0">
             <a:extLst xmlns:a="http://schemas.openxmlformats.org/drawingml/2006/main">
               <a:ext uri="{FF2B5EF4-FFF2-40B4-BE49-F238E27FC236}">
-                <a16:creationId xmlns:a16="http://schemas.microsoft.com/office/drawing/2014/main" id="{F73DD1EA-8226-4714-92F3-FACE77CD5510}"/>
+                <a16:creationId xmlns:a16="http://schemas.microsoft.com/office/drawing/2014/main" id="{A8A6067F-E96B-41CB-9C5B-F065723352B2}"/>
               </a:ext>
             </a:extLst>
           </p:cNvPr>
@@ -3693,7 +3631,7 @@
           <p:cNvPr id="22" name="table-cell-620.96-3-1">
             <a:extLst xmlns:a="http://schemas.openxmlformats.org/drawingml/2006/main">
               <a:ext uri="{FF2B5EF4-FFF2-40B4-BE49-F238E27FC236}">
-                <a16:creationId xmlns:a16="http://schemas.microsoft.com/office/drawing/2014/main" id="{9E57DB30-C730-48AD-8C56-3BFA0FCD9148}"/>
+                <a16:creationId xmlns:a16="http://schemas.microsoft.com/office/drawing/2014/main" id="{3FF9068D-3B45-4016-A9D4-D728E8F563A0}"/>
               </a:ext>
             </a:extLst>
           </p:cNvPr>
@@ -3726,7 +3664,7 @@
           <p:cNvPr id="23" name="table-text-620.96-3-1">
             <a:extLst xmlns:a="http://schemas.openxmlformats.org/drawingml/2006/main">
               <a:ext uri="{FF2B5EF4-FFF2-40B4-BE49-F238E27FC236}">
-                <a16:creationId xmlns:a16="http://schemas.microsoft.com/office/drawing/2014/main" id="{C2ED987C-8607-4AAC-B3EF-56F1445CB745}"/>
+                <a16:creationId xmlns:a16="http://schemas.microsoft.com/office/drawing/2014/main" id="{921EC26A-722A-44B3-B3B7-C6AF213C5084}"/>
               </a:ext>
             </a:extLst>
           </p:cNvPr>
@@ -3788,7 +3726,7 @@
           <p:cNvPr id="24" name="table-cell-620.96-4-0">
             <a:extLst xmlns:a="http://schemas.openxmlformats.org/drawingml/2006/main">
               <a:ext uri="{FF2B5EF4-FFF2-40B4-BE49-F238E27FC236}">
-                <a16:creationId xmlns:a16="http://schemas.microsoft.com/office/drawing/2014/main" id="{B12A7C4D-83D6-4BC3-B10E-6A8B8D61A655}"/>
+                <a16:creationId xmlns:a16="http://schemas.microsoft.com/office/drawing/2014/main" id="{7CC83FFB-B8B6-4B43-88FC-4A745FED0DB8}"/>
               </a:ext>
             </a:extLst>
           </p:cNvPr>
@@ -3821,7 +3759,7 @@
           <p:cNvPr id="25" name="table-text-620.96-4-0">
             <a:extLst xmlns:a="http://schemas.openxmlformats.org/drawingml/2006/main">
               <a:ext uri="{FF2B5EF4-FFF2-40B4-BE49-F238E27FC236}">
-                <a16:creationId xmlns:a16="http://schemas.microsoft.com/office/drawing/2014/main" id="{9811D0DB-0A42-45FA-B6C4-715FBAEAFBB2}"/>
+                <a16:creationId xmlns:a16="http://schemas.microsoft.com/office/drawing/2014/main" id="{E807E177-E35D-41C1-8CCE-F33E6937CA34}"/>
               </a:ext>
             </a:extLst>
           </p:cNvPr>
@@ -3883,7 +3821,7 @@
           <p:cNvPr id="26" name="table-cell-620.96-4-1">
             <a:extLst xmlns:a="http://schemas.openxmlformats.org/drawingml/2006/main">
               <a:ext uri="{FF2B5EF4-FFF2-40B4-BE49-F238E27FC236}">
-                <a16:creationId xmlns:a16="http://schemas.microsoft.com/office/drawing/2014/main" id="{43101957-BA0B-44D1-AFCF-069B381A4F6A}"/>
+                <a16:creationId xmlns:a16="http://schemas.microsoft.com/office/drawing/2014/main" id="{9AFF681B-C4A3-47BE-81B3-3F328B1C2E4A}"/>
               </a:ext>
             </a:extLst>
           </p:cNvPr>
@@ -3916,7 +3854,7 @@
           <p:cNvPr id="27" name="table-text-620.96-4-1">
             <a:extLst xmlns:a="http://schemas.openxmlformats.org/drawingml/2006/main">
               <a:ext uri="{FF2B5EF4-FFF2-40B4-BE49-F238E27FC236}">
-                <a16:creationId xmlns:a16="http://schemas.microsoft.com/office/drawing/2014/main" id="{8867F3CA-AA92-4B56-AEE5-7F10107DAAB2}"/>
+                <a16:creationId xmlns:a16="http://schemas.microsoft.com/office/drawing/2014/main" id="{A2936C60-2B98-43EE-9603-26DCA8E0FAF9}"/>
               </a:ext>
             </a:extLst>
           </p:cNvPr>
@@ -3976,7 +3914,7 @@
     </p:spTree>
     <p:extLst>
       <p:ext uri="{BB962C8B-B14F-4D97-AF65-F5344CB8AC3E}">
-        <p14:creationId xmlns:p14="http://schemas.microsoft.com/office/powerpoint/2010/main" val="884235942"/>
+        <p14:creationId xmlns:p14="http://schemas.microsoft.com/office/powerpoint/2010/main" val="634744224"/>
       </p:ext>
     </p:extLst>
   </p:cSld>
@@ -4007,7 +3945,7 @@
           <p:cNvPr id="7" name="running-label">
             <a:extLst xmlns:a="http://schemas.openxmlformats.org/drawingml/2006/main">
               <a:ext uri="{FF2B5EF4-FFF2-40B4-BE49-F238E27FC236}">
-                <a16:creationId xmlns:a16="http://schemas.microsoft.com/office/drawing/2014/main" id="{8669D035-EB79-4C40-8AE5-E2D7F26030C7}"/>
+                <a16:creationId xmlns:a16="http://schemas.microsoft.com/office/drawing/2014/main" id="{BE8F6312-423E-4330-B3CD-5C9460179118}"/>
               </a:ext>
             </a:extLst>
           </p:cNvPr>
@@ -4069,7 +4007,7 @@
           <p:cNvPr id="2" name="page-number">
             <a:extLst xmlns:a="http://schemas.openxmlformats.org/drawingml/2006/main">
               <a:ext uri="{FF2B5EF4-FFF2-40B4-BE49-F238E27FC236}">
-                <a16:creationId xmlns:a16="http://schemas.microsoft.com/office/drawing/2014/main" id="{50C2F065-E6B7-4502-A664-4BC5C7C72CCA}"/>
+                <a16:creationId xmlns:a16="http://schemas.microsoft.com/office/drawing/2014/main" id="{44463053-F471-4908-8D88-DD0A3CAC1DB8}"/>
               </a:ext>
             </a:extLst>
           </p:cNvPr>
@@ -4131,7 +4069,7 @@
           <p:cNvPr id="3" name="header-rule">
             <a:extLst xmlns:a="http://schemas.openxmlformats.org/drawingml/2006/main">
               <a:ext uri="{FF2B5EF4-FFF2-40B4-BE49-F238E27FC236}">
-                <a16:creationId xmlns:a16="http://schemas.microsoft.com/office/drawing/2014/main" id="{8F169046-F95E-43B9-A614-14D9FCDBEF98}"/>
+                <a16:creationId xmlns:a16="http://schemas.microsoft.com/office/drawing/2014/main" id="{678C1745-9DD9-4BB7-9D2F-34A6ACFDBC94}"/>
               </a:ext>
             </a:extLst>
           </p:cNvPr>
@@ -4162,7 +4100,7 @@
           <p:cNvPr id="4" name="slide-title">
             <a:extLst xmlns:a="http://schemas.openxmlformats.org/drawingml/2006/main">
               <a:ext uri="{FF2B5EF4-FFF2-40B4-BE49-F238E27FC236}">
-                <a16:creationId xmlns:a16="http://schemas.microsoft.com/office/drawing/2014/main" id="{6B2438F6-602A-45B9-BD55-709D905D45C9}"/>
+                <a16:creationId xmlns:a16="http://schemas.microsoft.com/office/drawing/2014/main" id="{9BDBC2E0-C46B-4009-921B-256CD2A44EFE}"/>
               </a:ext>
             </a:extLst>
           </p:cNvPr>
@@ -4224,7 +4162,7 @@
           <p:cNvPr id="5" name="paragraph-140">
             <a:extLst xmlns:a="http://schemas.openxmlformats.org/drawingml/2006/main">
               <a:ext uri="{FF2B5EF4-FFF2-40B4-BE49-F238E27FC236}">
-                <a16:creationId xmlns:a16="http://schemas.microsoft.com/office/drawing/2014/main" id="{A2063A5D-B55B-451F-A03F-D480DFF85FC3}"/>
+                <a16:creationId xmlns:a16="http://schemas.microsoft.com/office/drawing/2014/main" id="{C8C64E22-28C4-4073-830F-90D07BD5C2ED}"/>
               </a:ext>
             </a:extLst>
           </p:cNvPr>
@@ -4286,7 +4224,7 @@
           <p:cNvPr id="6" name="bullets-212.64">
             <a:extLst xmlns:a="http://schemas.openxmlformats.org/drawingml/2006/main">
               <a:ext uri="{FF2B5EF4-FFF2-40B4-BE49-F238E27FC236}">
-                <a16:creationId xmlns:a16="http://schemas.microsoft.com/office/drawing/2014/main" id="{3EA893F5-1E4F-46ED-9968-96F39C60B03E}"/>
+                <a16:creationId xmlns:a16="http://schemas.microsoft.com/office/drawing/2014/main" id="{FD3FE128-E9E9-4BA0-A496-5F678ACE37A3}"/>
               </a:ext>
             </a:extLst>
           </p:cNvPr>
@@ -4409,7 +4347,7 @@
     </p:spTree>
     <p:extLst>
       <p:ext uri="{BB962C8B-B14F-4D97-AF65-F5344CB8AC3E}">
-        <p14:creationId xmlns:p14="http://schemas.microsoft.com/office/powerpoint/2010/main" val="1953042437"/>
+        <p14:creationId xmlns:p14="http://schemas.microsoft.com/office/powerpoint/2010/main" val="163465922"/>
       </p:ext>
     </p:extLst>
   </p:cSld>
@@ -4440,7 +4378,7 @@
           <p:cNvPr id="13" name="running-label">
             <a:extLst xmlns:a="http://schemas.openxmlformats.org/drawingml/2006/main">
               <a:ext uri="{FF2B5EF4-FFF2-40B4-BE49-F238E27FC236}">
-                <a16:creationId xmlns:a16="http://schemas.microsoft.com/office/drawing/2014/main" id="{C032F9B2-327A-4532-98A1-A286835F2C48}"/>
+                <a16:creationId xmlns:a16="http://schemas.microsoft.com/office/drawing/2014/main" id="{BA7BBA09-C0D3-4E1E-A368-4D0513101026}"/>
               </a:ext>
             </a:extLst>
           </p:cNvPr>
@@ -4502,7 +4440,7 @@
           <p:cNvPr id="2" name="page-number">
             <a:extLst xmlns:a="http://schemas.openxmlformats.org/drawingml/2006/main">
               <a:ext uri="{FF2B5EF4-FFF2-40B4-BE49-F238E27FC236}">
-                <a16:creationId xmlns:a16="http://schemas.microsoft.com/office/drawing/2014/main" id="{BF9496D8-7BF0-4580-AD80-7CEBFEA04130}"/>
+                <a16:creationId xmlns:a16="http://schemas.microsoft.com/office/drawing/2014/main" id="{EA2D5EF0-9C91-4EDA-B61E-F046D7A68759}"/>
               </a:ext>
             </a:extLst>
           </p:cNvPr>
@@ -4564,7 +4502,7 @@
           <p:cNvPr id="3" name="header-rule">
             <a:extLst xmlns:a="http://schemas.openxmlformats.org/drawingml/2006/main">
               <a:ext uri="{FF2B5EF4-FFF2-40B4-BE49-F238E27FC236}">
-                <a16:creationId xmlns:a16="http://schemas.microsoft.com/office/drawing/2014/main" id="{0FECE91C-9375-485B-9B7D-416651FA61DC}"/>
+                <a16:creationId xmlns:a16="http://schemas.microsoft.com/office/drawing/2014/main" id="{C5DEF960-3FD8-4879-8323-176A01EB7D42}"/>
               </a:ext>
             </a:extLst>
           </p:cNvPr>
@@ -4595,7 +4533,7 @@
           <p:cNvPr id="4" name="slide-title">
             <a:extLst xmlns:a="http://schemas.openxmlformats.org/drawingml/2006/main">
               <a:ext uri="{FF2B5EF4-FFF2-40B4-BE49-F238E27FC236}">
-                <a16:creationId xmlns:a16="http://schemas.microsoft.com/office/drawing/2014/main" id="{256C12BC-6AA6-4F76-8D0B-7460D3E32F3B}"/>
+                <a16:creationId xmlns:a16="http://schemas.microsoft.com/office/drawing/2014/main" id="{9DCF8018-D3D4-43FA-9834-6CC403354474}"/>
               </a:ext>
             </a:extLst>
           </p:cNvPr>
@@ -4657,7 +4595,7 @@
           <p:cNvPr id="5" name="subheading-140">
             <a:extLst xmlns:a="http://schemas.openxmlformats.org/drawingml/2006/main">
               <a:ext uri="{FF2B5EF4-FFF2-40B4-BE49-F238E27FC236}">
-                <a16:creationId xmlns:a16="http://schemas.microsoft.com/office/drawing/2014/main" id="{43135C36-937B-4249-B25C-0606672019FD}"/>
+                <a16:creationId xmlns:a16="http://schemas.microsoft.com/office/drawing/2014/main" id="{9263DEB0-A095-4A7F-ACCE-08B4F734571E}"/>
               </a:ext>
             </a:extLst>
           </p:cNvPr>
@@ -4719,7 +4657,7 @@
           <p:cNvPr id="6" name="paragraph-194">
             <a:extLst xmlns:a="http://schemas.openxmlformats.org/drawingml/2006/main">
               <a:ext uri="{FF2B5EF4-FFF2-40B4-BE49-F238E27FC236}">
-                <a16:creationId xmlns:a16="http://schemas.microsoft.com/office/drawing/2014/main" id="{B6D43BA2-8A58-4159-BAA9-5ECFCEE7D6C6}"/>
+                <a16:creationId xmlns:a16="http://schemas.microsoft.com/office/drawing/2014/main" id="{ACD63944-FC26-4B80-9205-FE97796E536E}"/>
               </a:ext>
             </a:extLst>
           </p:cNvPr>
@@ -4785,7 +4723,7 @@
           <p:nvPr/>
         </p:nvPicPr>
         <p:blipFill>
-          <a:blip xmlns:r="http://schemas.openxmlformats.org/officeDocument/2006/relationships" xmlns:a="http://schemas.openxmlformats.org/drawingml/2006/main" r:embed="Rfa36df8e6c424983"/>
+          <a:blip xmlns:r="http://schemas.openxmlformats.org/officeDocument/2006/relationships" xmlns:a="http://schemas.openxmlformats.org/drawingml/2006/main" r:embed="R37e6c29811544e3e"/>
           <a:stretch xmlns:a="http://schemas.openxmlformats.org/drawingml/2006/main"/>
         </p:blipFill>
         <p:spPr>
@@ -4805,7 +4743,7 @@
           <p:cNvPr id="8" name="image-caption-266.64">
             <a:extLst xmlns:a="http://schemas.openxmlformats.org/drawingml/2006/main">
               <a:ext uri="{FF2B5EF4-FFF2-40B4-BE49-F238E27FC236}">
-                <a16:creationId xmlns:a16="http://schemas.microsoft.com/office/drawing/2014/main" id="{1BEDD69B-4E37-4F88-92E5-DB8704C2F61E}"/>
+                <a16:creationId xmlns:a16="http://schemas.microsoft.com/office/drawing/2014/main" id="{A5115DE3-5ABF-4C26-A56E-635E3E5E7D7F}"/>
               </a:ext>
             </a:extLst>
           </p:cNvPr>
@@ -4867,7 +4805,7 @@
           <p:cNvPr id="9" name="subheading-650.64">
             <a:extLst xmlns:a="http://schemas.openxmlformats.org/drawingml/2006/main">
               <a:ext uri="{FF2B5EF4-FFF2-40B4-BE49-F238E27FC236}">
-                <a16:creationId xmlns:a16="http://schemas.microsoft.com/office/drawing/2014/main" id="{71414570-3634-4716-A49E-C132D07CC791}"/>
+                <a16:creationId xmlns:a16="http://schemas.microsoft.com/office/drawing/2014/main" id="{9B8A73D8-5C54-4E29-A6EF-BD72DC66F2CA}"/>
               </a:ext>
             </a:extLst>
           </p:cNvPr>
@@ -4929,7 +4867,7 @@
           <p:cNvPr id="10" name="paragraph-704.64">
             <a:extLst xmlns:a="http://schemas.openxmlformats.org/drawingml/2006/main">
               <a:ext uri="{FF2B5EF4-FFF2-40B4-BE49-F238E27FC236}">
-                <a16:creationId xmlns:a16="http://schemas.microsoft.com/office/drawing/2014/main" id="{FB245787-E81D-42B3-AD26-D377E070CF63}"/>
+                <a16:creationId xmlns:a16="http://schemas.microsoft.com/office/drawing/2014/main" id="{6FD83639-8E7F-443F-86A2-587292459E95}"/>
               </a:ext>
             </a:extLst>
           </p:cNvPr>
@@ -4991,7 +4929,7 @@
           <p:cNvPr id="11" name="subheading-801.6">
             <a:extLst xmlns:a="http://schemas.openxmlformats.org/drawingml/2006/main">
               <a:ext uri="{FF2B5EF4-FFF2-40B4-BE49-F238E27FC236}">
-                <a16:creationId xmlns:a16="http://schemas.microsoft.com/office/drawing/2014/main" id="{07A98A1A-C68A-4A78-A297-029E1514E9D4}"/>
+                <a16:creationId xmlns:a16="http://schemas.microsoft.com/office/drawing/2014/main" id="{B3E15083-4BF1-4D7F-80E0-599A943831DF}"/>
               </a:ext>
             </a:extLst>
           </p:cNvPr>
@@ -5053,7 +4991,7 @@
           <p:cNvPr id="12" name="paragraph-855.6">
             <a:extLst xmlns:a="http://schemas.openxmlformats.org/drawingml/2006/main">
               <a:ext uri="{FF2B5EF4-FFF2-40B4-BE49-F238E27FC236}">
-                <a16:creationId xmlns:a16="http://schemas.microsoft.com/office/drawing/2014/main" id="{8458D814-6052-4B56-83D6-2973CA645E70}"/>
+                <a16:creationId xmlns:a16="http://schemas.microsoft.com/office/drawing/2014/main" id="{95F0EE8F-B532-415B-89F4-F89B1AA193A6}"/>
               </a:ext>
             </a:extLst>
           </p:cNvPr>
@@ -5113,7 +5051,7 @@
     </p:spTree>
     <p:extLst>
       <p:ext uri="{BB962C8B-B14F-4D97-AF65-F5344CB8AC3E}">
-        <p14:creationId xmlns:p14="http://schemas.microsoft.com/office/powerpoint/2010/main" val="1702503242"/>
+        <p14:creationId xmlns:p14="http://schemas.microsoft.com/office/powerpoint/2010/main" val="378730613"/>
       </p:ext>
     </p:extLst>
   </p:cSld>
@@ -5144,7 +5082,7 @@
           <p:cNvPr id="13" name="running-label">
             <a:extLst xmlns:a="http://schemas.openxmlformats.org/drawingml/2006/main">
               <a:ext uri="{FF2B5EF4-FFF2-40B4-BE49-F238E27FC236}">
-                <a16:creationId xmlns:a16="http://schemas.microsoft.com/office/drawing/2014/main" id="{D4BF0F0D-A84F-431C-85BE-1907AC0A9DE4}"/>
+                <a16:creationId xmlns:a16="http://schemas.microsoft.com/office/drawing/2014/main" id="{4B0F93DC-014B-452F-B899-0EB40176CAFC}"/>
               </a:ext>
             </a:extLst>
           </p:cNvPr>
@@ -5206,7 +5144,7 @@
           <p:cNvPr id="2" name="page-number">
             <a:extLst xmlns:a="http://schemas.openxmlformats.org/drawingml/2006/main">
               <a:ext uri="{FF2B5EF4-FFF2-40B4-BE49-F238E27FC236}">
-                <a16:creationId xmlns:a16="http://schemas.microsoft.com/office/drawing/2014/main" id="{0AF088E6-6EEC-4638-AB85-6171A5B73972}"/>
+                <a16:creationId xmlns:a16="http://schemas.microsoft.com/office/drawing/2014/main" id="{92FF3B36-0F9F-494F-8F0C-84D95F719FCE}"/>
               </a:ext>
             </a:extLst>
           </p:cNvPr>
@@ -5268,7 +5206,7 @@
           <p:cNvPr id="3" name="header-rule">
             <a:extLst xmlns:a="http://schemas.openxmlformats.org/drawingml/2006/main">
               <a:ext uri="{FF2B5EF4-FFF2-40B4-BE49-F238E27FC236}">
-                <a16:creationId xmlns:a16="http://schemas.microsoft.com/office/drawing/2014/main" id="{B6222BAF-7FAD-4C62-B006-7D228FADD7A2}"/>
+                <a16:creationId xmlns:a16="http://schemas.microsoft.com/office/drawing/2014/main" id="{35D1CC70-F5E8-44BD-9EE2-789142444E44}"/>
               </a:ext>
             </a:extLst>
           </p:cNvPr>
@@ -5299,7 +5237,7 @@
           <p:cNvPr id="4" name="slide-title">
             <a:extLst xmlns:a="http://schemas.openxmlformats.org/drawingml/2006/main">
               <a:ext uri="{FF2B5EF4-FFF2-40B4-BE49-F238E27FC236}">
-                <a16:creationId xmlns:a16="http://schemas.microsoft.com/office/drawing/2014/main" id="{E6D70A09-BE32-4C26-98C9-7D6B7493D47B}"/>
+                <a16:creationId xmlns:a16="http://schemas.microsoft.com/office/drawing/2014/main" id="{264827EB-4C46-4B97-ABB5-74E53734BFD3}"/>
               </a:ext>
             </a:extLst>
           </p:cNvPr>
@@ -5361,7 +5299,7 @@
           <p:cNvPr id="5" name="subheading-140">
             <a:extLst xmlns:a="http://schemas.openxmlformats.org/drawingml/2006/main">
               <a:ext uri="{FF2B5EF4-FFF2-40B4-BE49-F238E27FC236}">
-                <a16:creationId xmlns:a16="http://schemas.microsoft.com/office/drawing/2014/main" id="{044EA392-FEC0-4E01-B396-A3A6C9BAE52F}"/>
+                <a16:creationId xmlns:a16="http://schemas.microsoft.com/office/drawing/2014/main" id="{B5E1368D-094A-4861-B69D-95C96865BFEB}"/>
               </a:ext>
             </a:extLst>
           </p:cNvPr>
@@ -5423,7 +5361,7 @@
           <p:cNvPr id="6" name="paragraph-194">
             <a:extLst xmlns:a="http://schemas.openxmlformats.org/drawingml/2006/main">
               <a:ext uri="{FF2B5EF4-FFF2-40B4-BE49-F238E27FC236}">
-                <a16:creationId xmlns:a16="http://schemas.microsoft.com/office/drawing/2014/main" id="{D39408FF-4AC4-4012-BFD2-9FBB67910FEF}"/>
+                <a16:creationId xmlns:a16="http://schemas.microsoft.com/office/drawing/2014/main" id="{E99963CA-D7A3-40E4-B1EF-B1D13570E7AC}"/>
               </a:ext>
             </a:extLst>
           </p:cNvPr>
@@ -5485,7 +5423,7 @@
           <p:cNvPr id="7" name="paragraph-242.32">
             <a:extLst xmlns:a="http://schemas.openxmlformats.org/drawingml/2006/main">
               <a:ext uri="{FF2B5EF4-FFF2-40B4-BE49-F238E27FC236}">
-                <a16:creationId xmlns:a16="http://schemas.microsoft.com/office/drawing/2014/main" id="{D942EA86-7491-4247-BC55-9827C3209CD6}"/>
+                <a16:creationId xmlns:a16="http://schemas.microsoft.com/office/drawing/2014/main" id="{0E57ADE8-E830-4493-AFE4-CC1E0055E624}"/>
               </a:ext>
             </a:extLst>
           </p:cNvPr>
@@ -5551,7 +5489,7 @@
           <p:nvPr/>
         </p:nvPicPr>
         <p:blipFill>
-          <a:blip xmlns:r="http://schemas.openxmlformats.org/officeDocument/2006/relationships" xmlns:a="http://schemas.openxmlformats.org/drawingml/2006/main" r:embed="R2828751b52d94926"/>
+          <a:blip xmlns:r="http://schemas.openxmlformats.org/officeDocument/2006/relationships" xmlns:a="http://schemas.openxmlformats.org/drawingml/2006/main" r:embed="Re20b65190037426c"/>
           <a:stretch xmlns:a="http://schemas.openxmlformats.org/drawingml/2006/main"/>
         </p:blipFill>
         <p:spPr>
@@ -5571,7 +5509,7 @@
           <p:cNvPr id="9" name="image-caption-314.96">
             <a:extLst xmlns:a="http://schemas.openxmlformats.org/drawingml/2006/main">
               <a:ext uri="{FF2B5EF4-FFF2-40B4-BE49-F238E27FC236}">
-                <a16:creationId xmlns:a16="http://schemas.microsoft.com/office/drawing/2014/main" id="{B659FF8C-71C9-4F02-B8FE-219E62A2640B}"/>
+                <a16:creationId xmlns:a16="http://schemas.microsoft.com/office/drawing/2014/main" id="{E58BF402-4BF8-4836-A7C6-FFF78C92C06C}"/>
               </a:ext>
             </a:extLst>
           </p:cNvPr>
@@ -5633,7 +5571,7 @@
           <p:cNvPr id="10" name="subheading-698.96">
             <a:extLst xmlns:a="http://schemas.openxmlformats.org/drawingml/2006/main">
               <a:ext uri="{FF2B5EF4-FFF2-40B4-BE49-F238E27FC236}">
-                <a16:creationId xmlns:a16="http://schemas.microsoft.com/office/drawing/2014/main" id="{913B0129-FDDB-4A02-8905-6C3A2B0D3BAC}"/>
+                <a16:creationId xmlns:a16="http://schemas.microsoft.com/office/drawing/2014/main" id="{A6D5FEF3-6312-4140-869F-5FCF8E9F48DD}"/>
               </a:ext>
             </a:extLst>
           </p:cNvPr>
@@ -5695,7 +5633,7 @@
           <p:cNvPr id="11" name="paragraph-752.96">
             <a:extLst xmlns:a="http://schemas.openxmlformats.org/drawingml/2006/main">
               <a:ext uri="{FF2B5EF4-FFF2-40B4-BE49-F238E27FC236}">
-                <a16:creationId xmlns:a16="http://schemas.microsoft.com/office/drawing/2014/main" id="{9AA5B733-9DA4-4D3A-B7ED-288026DB5C98}"/>
+                <a16:creationId xmlns:a16="http://schemas.microsoft.com/office/drawing/2014/main" id="{16391AD3-4614-47BF-9BCA-18D22E815505}"/>
               </a:ext>
             </a:extLst>
           </p:cNvPr>
@@ -5757,7 +5695,7 @@
           <p:cNvPr id="12" name="paragraph-801.2800000000001">
             <a:extLst xmlns:a="http://schemas.openxmlformats.org/drawingml/2006/main">
               <a:ext uri="{FF2B5EF4-FFF2-40B4-BE49-F238E27FC236}">
-                <a16:creationId xmlns:a16="http://schemas.microsoft.com/office/drawing/2014/main" id="{94DA66F1-22C2-4D26-846D-F239F9208C11}"/>
+                <a16:creationId xmlns:a16="http://schemas.microsoft.com/office/drawing/2014/main" id="{FEAF39EC-E4C6-45DE-BBBB-B27EE7C514AA}"/>
               </a:ext>
             </a:extLst>
           </p:cNvPr>
@@ -5817,7 +5755,7 @@
     </p:spTree>
     <p:extLst>
       <p:ext uri="{BB962C8B-B14F-4D97-AF65-F5344CB8AC3E}">
-        <p14:creationId xmlns:p14="http://schemas.microsoft.com/office/powerpoint/2010/main" val="1302812088"/>
+        <p14:creationId xmlns:p14="http://schemas.microsoft.com/office/powerpoint/2010/main" val="2131246271"/>
       </p:ext>
     </p:extLst>
   </p:cSld>
@@ -5848,7 +5786,7 @@
           <p:cNvPr id="10" name="running-label">
             <a:extLst xmlns:a="http://schemas.openxmlformats.org/drawingml/2006/main">
               <a:ext uri="{FF2B5EF4-FFF2-40B4-BE49-F238E27FC236}">
-                <a16:creationId xmlns:a16="http://schemas.microsoft.com/office/drawing/2014/main" id="{31C910FA-C387-4C28-B8A4-6DFA6170D955}"/>
+                <a16:creationId xmlns:a16="http://schemas.microsoft.com/office/drawing/2014/main" id="{6A242301-726E-4433-86F0-1C00EA5DEE62}"/>
               </a:ext>
             </a:extLst>
           </p:cNvPr>
@@ -5910,7 +5848,7 @@
           <p:cNvPr id="2" name="page-number">
             <a:extLst xmlns:a="http://schemas.openxmlformats.org/drawingml/2006/main">
               <a:ext uri="{FF2B5EF4-FFF2-40B4-BE49-F238E27FC236}">
-                <a16:creationId xmlns:a16="http://schemas.microsoft.com/office/drawing/2014/main" id="{8A64D4DF-4480-45DF-A14A-B13206B5594F}"/>
+                <a16:creationId xmlns:a16="http://schemas.microsoft.com/office/drawing/2014/main" id="{B64A7E7A-8F99-449C-A125-D4AB813E41A5}"/>
               </a:ext>
             </a:extLst>
           </p:cNvPr>
@@ -5972,7 +5910,7 @@
           <p:cNvPr id="3" name="header-rule">
             <a:extLst xmlns:a="http://schemas.openxmlformats.org/drawingml/2006/main">
               <a:ext uri="{FF2B5EF4-FFF2-40B4-BE49-F238E27FC236}">
-                <a16:creationId xmlns:a16="http://schemas.microsoft.com/office/drawing/2014/main" id="{7403A017-B054-45BF-99E8-3883BB6D6375}"/>
+                <a16:creationId xmlns:a16="http://schemas.microsoft.com/office/drawing/2014/main" id="{EEAFCFA6-0EB9-492D-887C-BF3F6ED9412D}"/>
               </a:ext>
             </a:extLst>
           </p:cNvPr>
@@ -6003,7 +5941,7 @@
           <p:cNvPr id="4" name="slide-title">
             <a:extLst xmlns:a="http://schemas.openxmlformats.org/drawingml/2006/main">
               <a:ext uri="{FF2B5EF4-FFF2-40B4-BE49-F238E27FC236}">
-                <a16:creationId xmlns:a16="http://schemas.microsoft.com/office/drawing/2014/main" id="{96896AD0-C137-42CE-BFBA-B6E78A72B55F}"/>
+                <a16:creationId xmlns:a16="http://schemas.microsoft.com/office/drawing/2014/main" id="{423BBB4F-FA84-4538-A4B2-09AE16208C94}"/>
               </a:ext>
             </a:extLst>
           </p:cNvPr>
@@ -6069,7 +6007,7 @@
           <p:nvPr/>
         </p:nvPicPr>
         <p:blipFill>
-          <a:blip xmlns:r="http://schemas.openxmlformats.org/officeDocument/2006/relationships" xmlns:a="http://schemas.openxmlformats.org/drawingml/2006/main" r:embed="R77900a6a9404405a"/>
+          <a:blip xmlns:r="http://schemas.openxmlformats.org/officeDocument/2006/relationships" xmlns:a="http://schemas.openxmlformats.org/drawingml/2006/main" r:embed="Rbd4cdbe0101d408b"/>
           <a:stretch xmlns:a="http://schemas.openxmlformats.org/drawingml/2006/main"/>
         </p:blipFill>
         <p:spPr>
@@ -6089,7 +6027,7 @@
           <p:cNvPr id="6" name="image-caption-140">
             <a:extLst xmlns:a="http://schemas.openxmlformats.org/drawingml/2006/main">
               <a:ext uri="{FF2B5EF4-FFF2-40B4-BE49-F238E27FC236}">
-                <a16:creationId xmlns:a16="http://schemas.microsoft.com/office/drawing/2014/main" id="{1256298B-B204-4C25-9498-211535059CF0}"/>
+                <a16:creationId xmlns:a16="http://schemas.microsoft.com/office/drawing/2014/main" id="{A20A843A-8486-490F-B331-4C787ADCA8AD}"/>
               </a:ext>
             </a:extLst>
           </p:cNvPr>
@@ -6151,7 +6089,7 @@
           <p:cNvPr id="7" name="subheading-524">
             <a:extLst xmlns:a="http://schemas.openxmlformats.org/drawingml/2006/main">
               <a:ext uri="{FF2B5EF4-FFF2-40B4-BE49-F238E27FC236}">
-                <a16:creationId xmlns:a16="http://schemas.microsoft.com/office/drawing/2014/main" id="{B46C3C55-5A33-4AAD-83FD-1F9AC361A9CE}"/>
+                <a16:creationId xmlns:a16="http://schemas.microsoft.com/office/drawing/2014/main" id="{611E3743-D69F-41F5-BAD9-FE3F7D4E8876}"/>
               </a:ext>
             </a:extLst>
           </p:cNvPr>
@@ -6213,7 +6151,7 @@
           <p:cNvPr id="8" name="paragraph-578">
             <a:extLst xmlns:a="http://schemas.openxmlformats.org/drawingml/2006/main">
               <a:ext uri="{FF2B5EF4-FFF2-40B4-BE49-F238E27FC236}">
-                <a16:creationId xmlns:a16="http://schemas.microsoft.com/office/drawing/2014/main" id="{52A86F99-BEB0-41BD-BBCB-7B9256717E3D}"/>
+                <a16:creationId xmlns:a16="http://schemas.microsoft.com/office/drawing/2014/main" id="{14DCF7E7-D542-41F5-ADED-F5759B071F26}"/>
               </a:ext>
             </a:extLst>
           </p:cNvPr>
@@ -6275,7 +6213,7 @@
           <p:cNvPr id="9" name="paragraph-626.32">
             <a:extLst xmlns:a="http://schemas.openxmlformats.org/drawingml/2006/main">
               <a:ext uri="{FF2B5EF4-FFF2-40B4-BE49-F238E27FC236}">
-                <a16:creationId xmlns:a16="http://schemas.microsoft.com/office/drawing/2014/main" id="{53955DD9-60F8-4F58-8C17-DF3667CE60C4}"/>
+                <a16:creationId xmlns:a16="http://schemas.microsoft.com/office/drawing/2014/main" id="{C9B2FAAA-5747-4296-B71F-70D58D41E719}"/>
               </a:ext>
             </a:extLst>
           </p:cNvPr>
@@ -6335,7 +6273,7 @@
     </p:spTree>
     <p:extLst>
       <p:ext uri="{BB962C8B-B14F-4D97-AF65-F5344CB8AC3E}">
-        <p14:creationId xmlns:p14="http://schemas.microsoft.com/office/powerpoint/2010/main" val="905472057"/>
+        <p14:creationId xmlns:p14="http://schemas.microsoft.com/office/powerpoint/2010/main" val="342779643"/>
       </p:ext>
     </p:extLst>
   </p:cSld>
@@ -6366,7 +6304,7 @@
           <p:cNvPr id="52" name="running-label">
             <a:extLst xmlns:a="http://schemas.openxmlformats.org/drawingml/2006/main">
               <a:ext uri="{FF2B5EF4-FFF2-40B4-BE49-F238E27FC236}">
-                <a16:creationId xmlns:a16="http://schemas.microsoft.com/office/drawing/2014/main" id="{0C9361EB-66AC-4B73-B91B-D8913EF5FBAE}"/>
+                <a16:creationId xmlns:a16="http://schemas.microsoft.com/office/drawing/2014/main" id="{B58BDE9A-0726-4192-AA1F-4EF810AF4910}"/>
               </a:ext>
             </a:extLst>
           </p:cNvPr>
@@ -6428,7 +6366,7 @@
           <p:cNvPr id="2" name="page-number">
             <a:extLst xmlns:a="http://schemas.openxmlformats.org/drawingml/2006/main">
               <a:ext uri="{FF2B5EF4-FFF2-40B4-BE49-F238E27FC236}">
-                <a16:creationId xmlns:a16="http://schemas.microsoft.com/office/drawing/2014/main" id="{C4ABC5BA-F631-4DD9-8EF2-75083F041142}"/>
+                <a16:creationId xmlns:a16="http://schemas.microsoft.com/office/drawing/2014/main" id="{AF3E72A0-D33D-49A2-B34A-5F855B5D8B5A}"/>
               </a:ext>
             </a:extLst>
           </p:cNvPr>
@@ -6490,7 +6428,7 @@
           <p:cNvPr id="3" name="header-rule">
             <a:extLst xmlns:a="http://schemas.openxmlformats.org/drawingml/2006/main">
               <a:ext uri="{FF2B5EF4-FFF2-40B4-BE49-F238E27FC236}">
-                <a16:creationId xmlns:a16="http://schemas.microsoft.com/office/drawing/2014/main" id="{6BF0506C-ED5E-4B8E-9D6B-03997646B365}"/>
+                <a16:creationId xmlns:a16="http://schemas.microsoft.com/office/drawing/2014/main" id="{E4E95F5B-2147-469F-BB53-5305FE1FF2C5}"/>
               </a:ext>
             </a:extLst>
           </p:cNvPr>
@@ -6521,7 +6459,7 @@
           <p:cNvPr id="4" name="slide-title">
             <a:extLst xmlns:a="http://schemas.openxmlformats.org/drawingml/2006/main">
               <a:ext uri="{FF2B5EF4-FFF2-40B4-BE49-F238E27FC236}">
-                <a16:creationId xmlns:a16="http://schemas.microsoft.com/office/drawing/2014/main" id="{D4BFF0C8-0807-4215-86B2-A092EE13927B}"/>
+                <a16:creationId xmlns:a16="http://schemas.microsoft.com/office/drawing/2014/main" id="{6B59AADE-A02D-46E8-8A41-E9DCD1FD7C42}"/>
               </a:ext>
             </a:extLst>
           </p:cNvPr>
@@ -6583,7 +6521,7 @@
           <p:cNvPr id="5" name="paragraph-140">
             <a:extLst xmlns:a="http://schemas.openxmlformats.org/drawingml/2006/main">
               <a:ext uri="{FF2B5EF4-FFF2-40B4-BE49-F238E27FC236}">
-                <a16:creationId xmlns:a16="http://schemas.microsoft.com/office/drawing/2014/main" id="{C09FA894-89F8-472C-93F1-686A81D39989}"/>
+                <a16:creationId xmlns:a16="http://schemas.microsoft.com/office/drawing/2014/main" id="{79BE7D21-5CAD-4E20-9470-188BC98FE3CE}"/>
               </a:ext>
             </a:extLst>
           </p:cNvPr>
@@ -6645,7 +6583,7 @@
           <p:cNvPr id="6" name="workflow-arrow-212.64-0">
             <a:extLst xmlns:a="http://schemas.openxmlformats.org/drawingml/2006/main">
               <a:ext uri="{FF2B5EF4-FFF2-40B4-BE49-F238E27FC236}">
-                <a16:creationId xmlns:a16="http://schemas.microsoft.com/office/drawing/2014/main" id="{E1F70513-EF80-41A7-926A-0C3638669CB1}"/>
+                <a16:creationId xmlns:a16="http://schemas.microsoft.com/office/drawing/2014/main" id="{024F7E36-F8FE-48A4-ABF9-5C7320367061}"/>
               </a:ext>
             </a:extLst>
           </p:cNvPr>
@@ -6676,7 +6614,7 @@
           <p:cNvPr id="7" name="workflow-arrow-212.64-1">
             <a:extLst xmlns:a="http://schemas.openxmlformats.org/drawingml/2006/main">
               <a:ext uri="{FF2B5EF4-FFF2-40B4-BE49-F238E27FC236}">
-                <a16:creationId xmlns:a16="http://schemas.microsoft.com/office/drawing/2014/main" id="{F116EF8D-90E3-45E6-B761-B2C41C0CCBF4}"/>
+                <a16:creationId xmlns:a16="http://schemas.microsoft.com/office/drawing/2014/main" id="{09ABA270-1003-4793-877D-588CC0AA7859}"/>
               </a:ext>
             </a:extLst>
           </p:cNvPr>
@@ -6707,7 +6645,7 @@
           <p:cNvPr id="8" name="workflow-arrow-212.64-2">
             <a:extLst xmlns:a="http://schemas.openxmlformats.org/drawingml/2006/main">
               <a:ext uri="{FF2B5EF4-FFF2-40B4-BE49-F238E27FC236}">
-                <a16:creationId xmlns:a16="http://schemas.microsoft.com/office/drawing/2014/main" id="{53F2AEC7-432D-46A7-B194-163975B10290}"/>
+                <a16:creationId xmlns:a16="http://schemas.microsoft.com/office/drawing/2014/main" id="{CBEBA749-6FEC-436A-8860-0E193EA35ED9}"/>
               </a:ext>
             </a:extLst>
           </p:cNvPr>
@@ -6738,7 +6676,7 @@
           <p:cNvPr id="9" name="workflow-arrow-212.64-3">
             <a:extLst xmlns:a="http://schemas.openxmlformats.org/drawingml/2006/main">
               <a:ext uri="{FF2B5EF4-FFF2-40B4-BE49-F238E27FC236}">
-                <a16:creationId xmlns:a16="http://schemas.microsoft.com/office/drawing/2014/main" id="{99A77716-FDC7-41CB-9B82-131F7147A5B8}"/>
+                <a16:creationId xmlns:a16="http://schemas.microsoft.com/office/drawing/2014/main" id="{EF7121AB-323B-4C8D-9724-A548131B8B66}"/>
               </a:ext>
             </a:extLst>
           </p:cNvPr>
@@ -6769,7 +6707,7 @@
           <p:cNvPr id="10" name="workflow-node-212.64-0">
             <a:extLst xmlns:a="http://schemas.openxmlformats.org/drawingml/2006/main">
               <a:ext uri="{FF2B5EF4-FFF2-40B4-BE49-F238E27FC236}">
-                <a16:creationId xmlns:a16="http://schemas.microsoft.com/office/drawing/2014/main" id="{F8940ADC-5F56-4D39-9A24-315297E6563F}"/>
+                <a16:creationId xmlns:a16="http://schemas.microsoft.com/office/drawing/2014/main" id="{C85B038E-032D-4BE0-AFAE-AB19D5C42CF7}"/>
               </a:ext>
             </a:extLst>
           </p:cNvPr>
@@ -6804,7 +6742,7 @@
           <p:cNvPr id="11" name="workflow-label-212.64-0">
             <a:extLst xmlns:a="http://schemas.openxmlformats.org/drawingml/2006/main">
               <a:ext uri="{FF2B5EF4-FFF2-40B4-BE49-F238E27FC236}">
-                <a16:creationId xmlns:a16="http://schemas.microsoft.com/office/drawing/2014/main" id="{212C9D19-1E52-48EA-9590-5CB84717ED60}"/>
+                <a16:creationId xmlns:a16="http://schemas.microsoft.com/office/drawing/2014/main" id="{780ECE5E-F1A3-49CC-8884-84CA4A99F86A}"/>
               </a:ext>
             </a:extLst>
           </p:cNvPr>
@@ -6866,7 +6804,7 @@
           <p:cNvPr id="12" name="workflow-node-212.64-1">
             <a:extLst xmlns:a="http://schemas.openxmlformats.org/drawingml/2006/main">
               <a:ext uri="{FF2B5EF4-FFF2-40B4-BE49-F238E27FC236}">
-                <a16:creationId xmlns:a16="http://schemas.microsoft.com/office/drawing/2014/main" id="{F1C44D3F-210D-49DF-A7F1-92FC0179E585}"/>
+                <a16:creationId xmlns:a16="http://schemas.microsoft.com/office/drawing/2014/main" id="{C84604E3-C841-4FF9-AB57-11EE2E6CF36B}"/>
               </a:ext>
             </a:extLst>
           </p:cNvPr>
@@ -6901,7 +6839,7 @@
           <p:cNvPr id="13" name="workflow-label-212.64-1">
             <a:extLst xmlns:a="http://schemas.openxmlformats.org/drawingml/2006/main">
               <a:ext uri="{FF2B5EF4-FFF2-40B4-BE49-F238E27FC236}">
-                <a16:creationId xmlns:a16="http://schemas.microsoft.com/office/drawing/2014/main" id="{53C7D44A-0A38-43F6-889B-2085537FED29}"/>
+                <a16:creationId xmlns:a16="http://schemas.microsoft.com/office/drawing/2014/main" id="{3EC84394-6235-4ACB-A4A8-20142F6E276F}"/>
               </a:ext>
             </a:extLst>
           </p:cNvPr>
@@ -6963,7 +6901,7 @@
           <p:cNvPr id="14" name="workflow-node-212.64-2">
             <a:extLst xmlns:a="http://schemas.openxmlformats.org/drawingml/2006/main">
               <a:ext uri="{FF2B5EF4-FFF2-40B4-BE49-F238E27FC236}">
-                <a16:creationId xmlns:a16="http://schemas.microsoft.com/office/drawing/2014/main" id="{389915D6-1F31-48CE-8B8C-7CBC2F1D0E30}"/>
+                <a16:creationId xmlns:a16="http://schemas.microsoft.com/office/drawing/2014/main" id="{39E63FB8-356F-4118-BA7D-ABD9536F640D}"/>
               </a:ext>
             </a:extLst>
           </p:cNvPr>
@@ -6998,7 +6936,7 @@
           <p:cNvPr id="15" name="workflow-label-212.64-2">
             <a:extLst xmlns:a="http://schemas.openxmlformats.org/drawingml/2006/main">
               <a:ext uri="{FF2B5EF4-FFF2-40B4-BE49-F238E27FC236}">
-                <a16:creationId xmlns:a16="http://schemas.microsoft.com/office/drawing/2014/main" id="{2EEE5B23-D54F-4BCD-8708-9137D925529B}"/>
+                <a16:creationId xmlns:a16="http://schemas.microsoft.com/office/drawing/2014/main" id="{96F02E1C-1007-48F0-9D5D-D3E1E9B6A343}"/>
               </a:ext>
             </a:extLst>
           </p:cNvPr>
@@ -7060,7 +6998,7 @@
           <p:cNvPr id="16" name="workflow-node-212.64-3">
             <a:extLst xmlns:a="http://schemas.openxmlformats.org/drawingml/2006/main">
               <a:ext uri="{FF2B5EF4-FFF2-40B4-BE49-F238E27FC236}">
-                <a16:creationId xmlns:a16="http://schemas.microsoft.com/office/drawing/2014/main" id="{321DE54D-54FE-4A4F-8AE4-87D11C3D488D}"/>
+                <a16:creationId xmlns:a16="http://schemas.microsoft.com/office/drawing/2014/main" id="{9C75923C-CAFD-420E-A13B-E5946F3C1C18}"/>
               </a:ext>
             </a:extLst>
           </p:cNvPr>
@@ -7095,7 +7033,7 @@
           <p:cNvPr id="17" name="workflow-label-212.64-3">
             <a:extLst xmlns:a="http://schemas.openxmlformats.org/drawingml/2006/main">
               <a:ext uri="{FF2B5EF4-FFF2-40B4-BE49-F238E27FC236}">
-                <a16:creationId xmlns:a16="http://schemas.microsoft.com/office/drawing/2014/main" id="{6C43F9A7-58DB-43B9-B124-3C9E09969AA9}"/>
+                <a16:creationId xmlns:a16="http://schemas.microsoft.com/office/drawing/2014/main" id="{AB98A8F4-732D-45D2-BA7E-6EC986BF0606}"/>
               </a:ext>
             </a:extLst>
           </p:cNvPr>
@@ -7157,7 +7095,7 @@
           <p:cNvPr id="18" name="workflow-node-212.64-4">
             <a:extLst xmlns:a="http://schemas.openxmlformats.org/drawingml/2006/main">
               <a:ext uri="{FF2B5EF4-FFF2-40B4-BE49-F238E27FC236}">
-                <a16:creationId xmlns:a16="http://schemas.microsoft.com/office/drawing/2014/main" id="{A485B9BF-496D-47D4-BB0F-A706ED6A00A7}"/>
+                <a16:creationId xmlns:a16="http://schemas.microsoft.com/office/drawing/2014/main" id="{89A50205-8D9E-486C-A301-9E7577AD405C}"/>
               </a:ext>
             </a:extLst>
           </p:cNvPr>
@@ -7192,7 +7130,7 @@
           <p:cNvPr id="19" name="workflow-label-212.64-4">
             <a:extLst xmlns:a="http://schemas.openxmlformats.org/drawingml/2006/main">
               <a:ext uri="{FF2B5EF4-FFF2-40B4-BE49-F238E27FC236}">
-                <a16:creationId xmlns:a16="http://schemas.microsoft.com/office/drawing/2014/main" id="{B2A82A1D-9509-47AB-821C-EF3A431BF1FB}"/>
+                <a16:creationId xmlns:a16="http://schemas.microsoft.com/office/drawing/2014/main" id="{CA75015D-97AF-4F83-B138-B2C3DDA8E073}"/>
               </a:ext>
             </a:extLst>
           </p:cNvPr>
@@ -7254,7 +7192,7 @@
           <p:cNvPr id="20" name="workflow-note-212.64">
             <a:extLst xmlns:a="http://schemas.openxmlformats.org/drawingml/2006/main">
               <a:ext uri="{FF2B5EF4-FFF2-40B4-BE49-F238E27FC236}">
-                <a16:creationId xmlns:a16="http://schemas.microsoft.com/office/drawing/2014/main" id="{675A8CC5-2812-4D36-AA9B-C2E2DBB40AAE}"/>
+                <a16:creationId xmlns:a16="http://schemas.microsoft.com/office/drawing/2014/main" id="{742FB928-B09F-40E1-8429-020E961ADE01}"/>
               </a:ext>
             </a:extLst>
           </p:cNvPr>
@@ -7316,7 +7254,7 @@
           <p:cNvPr id="21" name="table-cell-378.64-0-0">
             <a:extLst xmlns:a="http://schemas.openxmlformats.org/drawingml/2006/main">
               <a:ext uri="{FF2B5EF4-FFF2-40B4-BE49-F238E27FC236}">
-                <a16:creationId xmlns:a16="http://schemas.microsoft.com/office/drawing/2014/main" id="{330B3C10-8D52-4D4A-9D7B-F4A5B1C9D4CC}"/>
+                <a16:creationId xmlns:a16="http://schemas.microsoft.com/office/drawing/2014/main" id="{C96B9C70-A0EC-4D72-86A5-7F0C1A2876C0}"/>
               </a:ext>
             </a:extLst>
           </p:cNvPr>
@@ -7349,7 +7287,7 @@
           <p:cNvPr id="22" name="table-text-378.64-0-0">
             <a:extLst xmlns:a="http://schemas.openxmlformats.org/drawingml/2006/main">
               <a:ext uri="{FF2B5EF4-FFF2-40B4-BE49-F238E27FC236}">
-                <a16:creationId xmlns:a16="http://schemas.microsoft.com/office/drawing/2014/main" id="{A59C1C28-3D66-4D7B-A78E-C0D1BFBDEA22}"/>
+                <a16:creationId xmlns:a16="http://schemas.microsoft.com/office/drawing/2014/main" id="{BF934A18-FCF9-45A5-83CD-602450C52B0D}"/>
               </a:ext>
             </a:extLst>
           </p:cNvPr>
@@ -7411,7 +7349,7 @@
           <p:cNvPr id="23" name="table-cell-378.64-0-1">
             <a:extLst xmlns:a="http://schemas.openxmlformats.org/drawingml/2006/main">
               <a:ext uri="{FF2B5EF4-FFF2-40B4-BE49-F238E27FC236}">
-                <a16:creationId xmlns:a16="http://schemas.microsoft.com/office/drawing/2014/main" id="{827FCA83-8B0C-4CC3-B8C5-18824D0AD8E7}"/>
+                <a16:creationId xmlns:a16="http://schemas.microsoft.com/office/drawing/2014/main" id="{99CFCB60-270A-40D5-B98E-86EBED0F56DA}"/>
               </a:ext>
             </a:extLst>
           </p:cNvPr>
@@ -7444,7 +7382,7 @@
           <p:cNvPr id="24" name="table-text-378.64-0-1">
             <a:extLst xmlns:a="http://schemas.openxmlformats.org/drawingml/2006/main">
               <a:ext uri="{FF2B5EF4-FFF2-40B4-BE49-F238E27FC236}">
-                <a16:creationId xmlns:a16="http://schemas.microsoft.com/office/drawing/2014/main" id="{AD07BF4B-6775-48F9-91A8-D8E5736D418B}"/>
+                <a16:creationId xmlns:a16="http://schemas.microsoft.com/office/drawing/2014/main" id="{62A8AF22-5883-4363-A463-7DEB1C45C2C0}"/>
               </a:ext>
             </a:extLst>
           </p:cNvPr>
@@ -7506,7 +7444,7 @@
           <p:cNvPr id="25" name="table-cell-378.64-0-2">
             <a:extLst xmlns:a="http://schemas.openxmlformats.org/drawingml/2006/main">
               <a:ext uri="{FF2B5EF4-FFF2-40B4-BE49-F238E27FC236}">
-                <a16:creationId xmlns:a16="http://schemas.microsoft.com/office/drawing/2014/main" id="{433EDA28-2BBF-44CD-8B65-3E89AA02EF06}"/>
+                <a16:creationId xmlns:a16="http://schemas.microsoft.com/office/drawing/2014/main" id="{2D78AB1F-6DC0-4267-8BA7-F37DAFB06E23}"/>
               </a:ext>
             </a:extLst>
           </p:cNvPr>
@@ -7539,7 +7477,7 @@
           <p:cNvPr id="26" name="table-text-378.64-0-2">
             <a:extLst xmlns:a="http://schemas.openxmlformats.org/drawingml/2006/main">
               <a:ext uri="{FF2B5EF4-FFF2-40B4-BE49-F238E27FC236}">
-                <a16:creationId xmlns:a16="http://schemas.microsoft.com/office/drawing/2014/main" id="{B6362BF5-9C5F-429F-B85C-A84D467AB079}"/>
+                <a16:creationId xmlns:a16="http://schemas.microsoft.com/office/drawing/2014/main" id="{9C6AE63A-4B2C-4719-B95C-A581B4CD6EB9}"/>
               </a:ext>
             </a:extLst>
           </p:cNvPr>
@@ -7601,7 +7539,7 @@
           <p:cNvPr id="27" name="table-cell-378.64-1-0">
             <a:extLst xmlns:a="http://schemas.openxmlformats.org/drawingml/2006/main">
               <a:ext uri="{FF2B5EF4-FFF2-40B4-BE49-F238E27FC236}">
-                <a16:creationId xmlns:a16="http://schemas.microsoft.com/office/drawing/2014/main" id="{61DAAA8A-FCC3-4DDC-BC22-A04C74034943}"/>
+                <a16:creationId xmlns:a16="http://schemas.microsoft.com/office/drawing/2014/main" id="{E9C07B32-AF3B-40C9-8D1E-05E2F40DAC04}"/>
               </a:ext>
             </a:extLst>
           </p:cNvPr>
@@ -7634,7 +7572,7 @@
           <p:cNvPr id="28" name="table-text-378.64-1-0">
             <a:extLst xmlns:a="http://schemas.openxmlformats.org/drawingml/2006/main">
               <a:ext uri="{FF2B5EF4-FFF2-40B4-BE49-F238E27FC236}">
-                <a16:creationId xmlns:a16="http://schemas.microsoft.com/office/drawing/2014/main" id="{BE122DEF-A6A9-46AC-A2CD-C50F897FFC67}"/>
+                <a16:creationId xmlns:a16="http://schemas.microsoft.com/office/drawing/2014/main" id="{00DF4C61-0113-4084-95E8-6E2EB41A6BDE}"/>
               </a:ext>
             </a:extLst>
           </p:cNvPr>
@@ -7696,7 +7634,7 @@
           <p:cNvPr id="29" name="table-cell-378.64-1-1">
             <a:extLst xmlns:a="http://schemas.openxmlformats.org/drawingml/2006/main">
               <a:ext uri="{FF2B5EF4-FFF2-40B4-BE49-F238E27FC236}">
-                <a16:creationId xmlns:a16="http://schemas.microsoft.com/office/drawing/2014/main" id="{5ADB1E93-5E11-4167-8B8C-C7A7F4E7CFC2}"/>
+                <a16:creationId xmlns:a16="http://schemas.microsoft.com/office/drawing/2014/main" id="{8548CF65-9371-4C5B-89D6-0A84324BDC2E}"/>
               </a:ext>
             </a:extLst>
           </p:cNvPr>
@@ -7729,7 +7667,7 @@
           <p:cNvPr id="30" name="table-text-378.64-1-1">
             <a:extLst xmlns:a="http://schemas.openxmlformats.org/drawingml/2006/main">
               <a:ext uri="{FF2B5EF4-FFF2-40B4-BE49-F238E27FC236}">
-                <a16:creationId xmlns:a16="http://schemas.microsoft.com/office/drawing/2014/main" id="{4882839F-5680-47E1-BE90-46E02AFE53F7}"/>
+                <a16:creationId xmlns:a16="http://schemas.microsoft.com/office/drawing/2014/main" id="{7773CE11-AD08-4BF2-9EDC-3071E5978696}"/>
               </a:ext>
             </a:extLst>
           </p:cNvPr>
@@ -7791,7 +7729,7 @@
           <p:cNvPr id="31" name="table-cell-378.64-1-2">
             <a:extLst xmlns:a="http://schemas.openxmlformats.org/drawingml/2006/main">
               <a:ext uri="{FF2B5EF4-FFF2-40B4-BE49-F238E27FC236}">
-                <a16:creationId xmlns:a16="http://schemas.microsoft.com/office/drawing/2014/main" id="{341529F0-173E-4279-84B8-F3DD6781CCA0}"/>
+                <a16:creationId xmlns:a16="http://schemas.microsoft.com/office/drawing/2014/main" id="{2DBED8A3-83E2-47D5-9507-FF0E4BE00BDE}"/>
               </a:ext>
             </a:extLst>
           </p:cNvPr>
@@ -7824,7 +7762,7 @@
           <p:cNvPr id="32" name="table-text-378.64-1-2">
             <a:extLst xmlns:a="http://schemas.openxmlformats.org/drawingml/2006/main">
               <a:ext uri="{FF2B5EF4-FFF2-40B4-BE49-F238E27FC236}">
-                <a16:creationId xmlns:a16="http://schemas.microsoft.com/office/drawing/2014/main" id="{9B48B38D-5B27-4750-806D-D4BD4AD1D4BF}"/>
+                <a16:creationId xmlns:a16="http://schemas.microsoft.com/office/drawing/2014/main" id="{15AB9EB6-7487-4601-99C8-DB5EBE7DB321}"/>
               </a:ext>
             </a:extLst>
           </p:cNvPr>
@@ -7886,7 +7824,7 @@
           <p:cNvPr id="33" name="table-cell-378.64-2-0">
             <a:extLst xmlns:a="http://schemas.openxmlformats.org/drawingml/2006/main">
               <a:ext uri="{FF2B5EF4-FFF2-40B4-BE49-F238E27FC236}">
-                <a16:creationId xmlns:a16="http://schemas.microsoft.com/office/drawing/2014/main" id="{B9A97A49-39D6-416F-91A9-5905D0BC294B}"/>
+                <a16:creationId xmlns:a16="http://schemas.microsoft.com/office/drawing/2014/main" id="{AB2A66AF-3A7F-4F4E-8ADD-8C42A02A7BD2}"/>
               </a:ext>
             </a:extLst>
           </p:cNvPr>
@@ -7919,7 +7857,7 @@
           <p:cNvPr id="34" name="table-text-378.64-2-0">
             <a:extLst xmlns:a="http://schemas.openxmlformats.org/drawingml/2006/main">
               <a:ext uri="{FF2B5EF4-FFF2-40B4-BE49-F238E27FC236}">
-                <a16:creationId xmlns:a16="http://schemas.microsoft.com/office/drawing/2014/main" id="{F8C7FA4B-0F12-41DD-B063-9DA6E792F46B}"/>
+                <a16:creationId xmlns:a16="http://schemas.microsoft.com/office/drawing/2014/main" id="{EEE8B0EC-35B5-42BE-A4D8-685D40660AEA}"/>
               </a:ext>
             </a:extLst>
           </p:cNvPr>
@@ -7981,7 +7919,7 @@
           <p:cNvPr id="35" name="table-cell-378.64-2-1">
             <a:extLst xmlns:a="http://schemas.openxmlformats.org/drawingml/2006/main">
               <a:ext uri="{FF2B5EF4-FFF2-40B4-BE49-F238E27FC236}">
-                <a16:creationId xmlns:a16="http://schemas.microsoft.com/office/drawing/2014/main" id="{08FABA80-C455-4043-A4B1-B9316C7BB183}"/>
+                <a16:creationId xmlns:a16="http://schemas.microsoft.com/office/drawing/2014/main" id="{2FFA2FFB-C60B-4917-ACCF-10F60B08631F}"/>
               </a:ext>
             </a:extLst>
           </p:cNvPr>
@@ -8014,7 +7952,7 @@
           <p:cNvPr id="36" name="table-text-378.64-2-1">
             <a:extLst xmlns:a="http://schemas.openxmlformats.org/drawingml/2006/main">
               <a:ext uri="{FF2B5EF4-FFF2-40B4-BE49-F238E27FC236}">
-                <a16:creationId xmlns:a16="http://schemas.microsoft.com/office/drawing/2014/main" id="{C1B54BAA-0BD2-4A98-83AB-94810804F896}"/>
+                <a16:creationId xmlns:a16="http://schemas.microsoft.com/office/drawing/2014/main" id="{1481C4C5-945B-4507-8F72-A4ED6BF7E770}"/>
               </a:ext>
             </a:extLst>
           </p:cNvPr>
@@ -8076,7 +8014,7 @@
           <p:cNvPr id="37" name="table-cell-378.64-2-2">
             <a:extLst xmlns:a="http://schemas.openxmlformats.org/drawingml/2006/main">
               <a:ext uri="{FF2B5EF4-FFF2-40B4-BE49-F238E27FC236}">
-                <a16:creationId xmlns:a16="http://schemas.microsoft.com/office/drawing/2014/main" id="{3E70098E-3503-44AE-BCEA-3DD7C359461C}"/>
+                <a16:creationId xmlns:a16="http://schemas.microsoft.com/office/drawing/2014/main" id="{9A21DBDD-BF87-463D-8C18-4AF70C2158C0}"/>
               </a:ext>
             </a:extLst>
           </p:cNvPr>
@@ -8109,7 +8047,7 @@
           <p:cNvPr id="38" name="table-text-378.64-2-2">
             <a:extLst xmlns:a="http://schemas.openxmlformats.org/drawingml/2006/main">
               <a:ext uri="{FF2B5EF4-FFF2-40B4-BE49-F238E27FC236}">
-                <a16:creationId xmlns:a16="http://schemas.microsoft.com/office/drawing/2014/main" id="{A50A3BAA-FD29-4E79-9E04-A5DDB186D761}"/>
+                <a16:creationId xmlns:a16="http://schemas.microsoft.com/office/drawing/2014/main" id="{167F7156-4254-45AC-A12C-E80F0F22FF24}"/>
               </a:ext>
             </a:extLst>
           </p:cNvPr>
@@ -8171,7 +8109,7 @@
           <p:cNvPr id="39" name="table-cell-378.64-3-0">
             <a:extLst xmlns:a="http://schemas.openxmlformats.org/drawingml/2006/main">
               <a:ext uri="{FF2B5EF4-FFF2-40B4-BE49-F238E27FC236}">
-                <a16:creationId xmlns:a16="http://schemas.microsoft.com/office/drawing/2014/main" id="{EC3A1C5B-7811-4397-A4CA-B7483BD79AE3}"/>
+                <a16:creationId xmlns:a16="http://schemas.microsoft.com/office/drawing/2014/main" id="{670ABBF7-EF29-4322-A07F-510A42124770}"/>
               </a:ext>
             </a:extLst>
           </p:cNvPr>
@@ -8204,7 +8142,7 @@
           <p:cNvPr id="40" name="table-text-378.64-3-0">
             <a:extLst xmlns:a="http://schemas.openxmlformats.org/drawingml/2006/main">
               <a:ext uri="{FF2B5EF4-FFF2-40B4-BE49-F238E27FC236}">
-                <a16:creationId xmlns:a16="http://schemas.microsoft.com/office/drawing/2014/main" id="{17F578DC-B688-4B33-B390-8F66DD56F22E}"/>
+                <a16:creationId xmlns:a16="http://schemas.microsoft.com/office/drawing/2014/main" id="{A7AAAAE8-3F25-444D-84EA-DFBD2807526F}"/>
               </a:ext>
             </a:extLst>
           </p:cNvPr>
@@ -8266,7 +8204,7 @@
           <p:cNvPr id="41" name="table-cell-378.64-3-1">
             <a:extLst xmlns:a="http://schemas.openxmlformats.org/drawingml/2006/main">
               <a:ext uri="{FF2B5EF4-FFF2-40B4-BE49-F238E27FC236}">
-                <a16:creationId xmlns:a16="http://schemas.microsoft.com/office/drawing/2014/main" id="{28080B77-7DCC-4B96-855D-03C26D3BF50C}"/>
+                <a16:creationId xmlns:a16="http://schemas.microsoft.com/office/drawing/2014/main" id="{40AC5235-81C2-4F1B-96CF-EB1384BCFFB5}"/>
               </a:ext>
             </a:extLst>
           </p:cNvPr>
@@ -8299,7 +8237,7 @@
           <p:cNvPr id="42" name="table-text-378.64-3-1">
             <a:extLst xmlns:a="http://schemas.openxmlformats.org/drawingml/2006/main">
               <a:ext uri="{FF2B5EF4-FFF2-40B4-BE49-F238E27FC236}">
-                <a16:creationId xmlns:a16="http://schemas.microsoft.com/office/drawing/2014/main" id="{3CC52ED0-EE83-4E32-BA19-E083D1B61D27}"/>
+                <a16:creationId xmlns:a16="http://schemas.microsoft.com/office/drawing/2014/main" id="{A702FA58-4DDC-4DC3-B281-C261B5B70DD4}"/>
               </a:ext>
             </a:extLst>
           </p:cNvPr>
@@ -8361,7 +8299,7 @@
           <p:cNvPr id="43" name="table-cell-378.64-3-2">
             <a:extLst xmlns:a="http://schemas.openxmlformats.org/drawingml/2006/main">
               <a:ext uri="{FF2B5EF4-FFF2-40B4-BE49-F238E27FC236}">
-                <a16:creationId xmlns:a16="http://schemas.microsoft.com/office/drawing/2014/main" id="{08AF5F15-3BC1-4627-8A16-4DDFA358F272}"/>
+                <a16:creationId xmlns:a16="http://schemas.microsoft.com/office/drawing/2014/main" id="{B2FE190B-79ED-405B-9EB2-581854E36D13}"/>
               </a:ext>
             </a:extLst>
           </p:cNvPr>
@@ -8394,7 +8332,7 @@
           <p:cNvPr id="44" name="table-text-378.64-3-2">
             <a:extLst xmlns:a="http://schemas.openxmlformats.org/drawingml/2006/main">
               <a:ext uri="{FF2B5EF4-FFF2-40B4-BE49-F238E27FC236}">
-                <a16:creationId xmlns:a16="http://schemas.microsoft.com/office/drawing/2014/main" id="{A271FDE7-EB9E-421A-A932-5C06F348975E}"/>
+                <a16:creationId xmlns:a16="http://schemas.microsoft.com/office/drawing/2014/main" id="{3960B466-8B08-469A-836F-C86BEF4FC2AA}"/>
               </a:ext>
             </a:extLst>
           </p:cNvPr>
@@ -8456,7 +8394,7 @@
           <p:cNvPr id="45" name="table-cell-378.64-4-0">
             <a:extLst xmlns:a="http://schemas.openxmlformats.org/drawingml/2006/main">
               <a:ext uri="{FF2B5EF4-FFF2-40B4-BE49-F238E27FC236}">
-                <a16:creationId xmlns:a16="http://schemas.microsoft.com/office/drawing/2014/main" id="{6CE9EB52-16A4-4DEF-A967-2018E3A412ED}"/>
+                <a16:creationId xmlns:a16="http://schemas.microsoft.com/office/drawing/2014/main" id="{D660436B-BCDE-42A1-BC81-880188669C87}"/>
               </a:ext>
             </a:extLst>
           </p:cNvPr>
@@ -8489,7 +8427,7 @@
           <p:cNvPr id="46" name="table-text-378.64-4-0">
             <a:extLst xmlns:a="http://schemas.openxmlformats.org/drawingml/2006/main">
               <a:ext uri="{FF2B5EF4-FFF2-40B4-BE49-F238E27FC236}">
-                <a16:creationId xmlns:a16="http://schemas.microsoft.com/office/drawing/2014/main" id="{D2E2CBB4-BCAB-4E26-888F-B32584DA87ED}"/>
+                <a16:creationId xmlns:a16="http://schemas.microsoft.com/office/drawing/2014/main" id="{B070E188-64B2-4814-92EC-705F947360CE}"/>
               </a:ext>
             </a:extLst>
           </p:cNvPr>
@@ -8551,7 +8489,7 @@
           <p:cNvPr id="47" name="table-cell-378.64-4-1">
             <a:extLst xmlns:a="http://schemas.openxmlformats.org/drawingml/2006/main">
               <a:ext uri="{FF2B5EF4-FFF2-40B4-BE49-F238E27FC236}">
-                <a16:creationId xmlns:a16="http://schemas.microsoft.com/office/drawing/2014/main" id="{30C7E2E2-A758-4F05-AD69-0FD9FEE732FB}"/>
+                <a16:creationId xmlns:a16="http://schemas.microsoft.com/office/drawing/2014/main" id="{28EAA088-BCB5-4380-8673-C36420A7B43B}"/>
               </a:ext>
             </a:extLst>
           </p:cNvPr>
@@ -8584,7 +8522,7 @@
           <p:cNvPr id="48" name="table-text-378.64-4-1">
             <a:extLst xmlns:a="http://schemas.openxmlformats.org/drawingml/2006/main">
               <a:ext uri="{FF2B5EF4-FFF2-40B4-BE49-F238E27FC236}">
-                <a16:creationId xmlns:a16="http://schemas.microsoft.com/office/drawing/2014/main" id="{36F8BE9D-DEA8-429B-8077-15AA28D977E2}"/>
+                <a16:creationId xmlns:a16="http://schemas.microsoft.com/office/drawing/2014/main" id="{EE8D3CBD-37F3-44AE-BB3C-5DD373E2239C}"/>
               </a:ext>
             </a:extLst>
           </p:cNvPr>
@@ -8646,7 +8584,7 @@
           <p:cNvPr id="49" name="table-cell-378.64-4-2">
             <a:extLst xmlns:a="http://schemas.openxmlformats.org/drawingml/2006/main">
               <a:ext uri="{FF2B5EF4-FFF2-40B4-BE49-F238E27FC236}">
-                <a16:creationId xmlns:a16="http://schemas.microsoft.com/office/drawing/2014/main" id="{F79FC590-08F9-4F0A-AFDE-259A913804F0}"/>
+                <a16:creationId xmlns:a16="http://schemas.microsoft.com/office/drawing/2014/main" id="{94425972-BC74-4931-A574-A351B74E02D8}"/>
               </a:ext>
             </a:extLst>
           </p:cNvPr>
@@ -8679,7 +8617,7 @@
           <p:cNvPr id="50" name="table-text-378.64-4-2">
             <a:extLst xmlns:a="http://schemas.openxmlformats.org/drawingml/2006/main">
               <a:ext uri="{FF2B5EF4-FFF2-40B4-BE49-F238E27FC236}">
-                <a16:creationId xmlns:a16="http://schemas.microsoft.com/office/drawing/2014/main" id="{F0343CB4-F1BD-4295-B504-17E7EA924B15}"/>
+                <a16:creationId xmlns:a16="http://schemas.microsoft.com/office/drawing/2014/main" id="{72F9D57B-14A0-4C58-BA06-3CD6ED4CB990}"/>
               </a:ext>
             </a:extLst>
           </p:cNvPr>
@@ -8741,7 +8679,7 @@
           <p:cNvPr id="51" name="paragraph-610.64">
             <a:extLst xmlns:a="http://schemas.openxmlformats.org/drawingml/2006/main">
               <a:ext uri="{FF2B5EF4-FFF2-40B4-BE49-F238E27FC236}">
-                <a16:creationId xmlns:a16="http://schemas.microsoft.com/office/drawing/2014/main" id="{DCDD2749-4167-4595-8ABB-962DF2A1FAE0}"/>
+                <a16:creationId xmlns:a16="http://schemas.microsoft.com/office/drawing/2014/main" id="{18526C8E-A772-4AB3-8200-679ED6AC69D7}"/>
               </a:ext>
             </a:extLst>
           </p:cNvPr>
@@ -8801,7 +8739,7 @@
     </p:spTree>
     <p:extLst>
       <p:ext uri="{BB962C8B-B14F-4D97-AF65-F5344CB8AC3E}">
-        <p14:creationId xmlns:p14="http://schemas.microsoft.com/office/powerpoint/2010/main" val="2014380031"/>
+        <p14:creationId xmlns:p14="http://schemas.microsoft.com/office/powerpoint/2010/main" val="1335252809"/>
       </p:ext>
     </p:extLst>
   </p:cSld>
@@ -8832,7 +8770,7 @@
           <p:cNvPr id="29" name="running-label">
             <a:extLst xmlns:a="http://schemas.openxmlformats.org/drawingml/2006/main">
               <a:ext uri="{FF2B5EF4-FFF2-40B4-BE49-F238E27FC236}">
-                <a16:creationId xmlns:a16="http://schemas.microsoft.com/office/drawing/2014/main" id="{DC72B1A6-8028-419C-A834-6FBCCF251CF6}"/>
+                <a16:creationId xmlns:a16="http://schemas.microsoft.com/office/drawing/2014/main" id="{105AC422-1C67-4494-A027-9E7BE19FC830}"/>
               </a:ext>
             </a:extLst>
           </p:cNvPr>
@@ -8894,7 +8832,7 @@
           <p:cNvPr id="2" name="page-number">
             <a:extLst xmlns:a="http://schemas.openxmlformats.org/drawingml/2006/main">
               <a:ext uri="{FF2B5EF4-FFF2-40B4-BE49-F238E27FC236}">
-                <a16:creationId xmlns:a16="http://schemas.microsoft.com/office/drawing/2014/main" id="{B2563383-E515-4451-AEB4-EEFB3952E61F}"/>
+                <a16:creationId xmlns:a16="http://schemas.microsoft.com/office/drawing/2014/main" id="{8FECCB09-480B-4B55-82CC-67B6209995FB}"/>
               </a:ext>
             </a:extLst>
           </p:cNvPr>
@@ -8956,7 +8894,7 @@
           <p:cNvPr id="3" name="header-rule">
             <a:extLst xmlns:a="http://schemas.openxmlformats.org/drawingml/2006/main">
               <a:ext uri="{FF2B5EF4-FFF2-40B4-BE49-F238E27FC236}">
-                <a16:creationId xmlns:a16="http://schemas.microsoft.com/office/drawing/2014/main" id="{9C1F2A44-7B2A-48AC-98B2-3E8F93EF671F}"/>
+                <a16:creationId xmlns:a16="http://schemas.microsoft.com/office/drawing/2014/main" id="{C18DF835-E280-4677-8C2D-CA8C9FA282BE}"/>
               </a:ext>
             </a:extLst>
           </p:cNvPr>
@@ -8987,7 +8925,7 @@
           <p:cNvPr id="4" name="slide-title">
             <a:extLst xmlns:a="http://schemas.openxmlformats.org/drawingml/2006/main">
               <a:ext uri="{FF2B5EF4-FFF2-40B4-BE49-F238E27FC236}">
-                <a16:creationId xmlns:a16="http://schemas.microsoft.com/office/drawing/2014/main" id="{5C5E8F15-9372-40EA-9E47-028DF6DE6664}"/>
+                <a16:creationId xmlns:a16="http://schemas.microsoft.com/office/drawing/2014/main" id="{79798FE4-878A-4334-A02D-A38E03B04B2C}"/>
               </a:ext>
             </a:extLst>
           </p:cNvPr>
@@ -9049,7 +8987,7 @@
           <p:cNvPr id="5" name="table-cell-140-0-0">
             <a:extLst xmlns:a="http://schemas.openxmlformats.org/drawingml/2006/main">
               <a:ext uri="{FF2B5EF4-FFF2-40B4-BE49-F238E27FC236}">
-                <a16:creationId xmlns:a16="http://schemas.microsoft.com/office/drawing/2014/main" id="{CD3D5263-3040-44CF-9F0E-3D5897D2D008}"/>
+                <a16:creationId xmlns:a16="http://schemas.microsoft.com/office/drawing/2014/main" id="{4C2D90E8-2CC6-4A15-ABD2-CE57C86341F4}"/>
               </a:ext>
             </a:extLst>
           </p:cNvPr>
@@ -9082,7 +9020,7 @@
           <p:cNvPr id="6" name="table-text-140-0-0">
             <a:extLst xmlns:a="http://schemas.openxmlformats.org/drawingml/2006/main">
               <a:ext uri="{FF2B5EF4-FFF2-40B4-BE49-F238E27FC236}">
-                <a16:creationId xmlns:a16="http://schemas.microsoft.com/office/drawing/2014/main" id="{25093B7B-7833-4916-AE54-3EF4620042FA}"/>
+                <a16:creationId xmlns:a16="http://schemas.microsoft.com/office/drawing/2014/main" id="{94C60CB7-73EB-4FC0-A759-1293D668F5DE}"/>
               </a:ext>
             </a:extLst>
           </p:cNvPr>
@@ -9144,7 +9082,7 @@
           <p:cNvPr id="7" name="table-cell-140-0-1">
             <a:extLst xmlns:a="http://schemas.openxmlformats.org/drawingml/2006/main">
               <a:ext uri="{FF2B5EF4-FFF2-40B4-BE49-F238E27FC236}">
-                <a16:creationId xmlns:a16="http://schemas.microsoft.com/office/drawing/2014/main" id="{31283B4D-8712-496D-BAA5-C9BC1E6965D1}"/>
+                <a16:creationId xmlns:a16="http://schemas.microsoft.com/office/drawing/2014/main" id="{7C3E80D9-00F2-4C91-83F3-5892A35BF994}"/>
               </a:ext>
             </a:extLst>
           </p:cNvPr>
@@ -9177,7 +9115,7 @@
           <p:cNvPr id="8" name="table-text-140-0-1">
             <a:extLst xmlns:a="http://schemas.openxmlformats.org/drawingml/2006/main">
               <a:ext uri="{FF2B5EF4-FFF2-40B4-BE49-F238E27FC236}">
-                <a16:creationId xmlns:a16="http://schemas.microsoft.com/office/drawing/2014/main" id="{90DC714F-85AE-4859-ACC8-42D6C037FBD4}"/>
+                <a16:creationId xmlns:a16="http://schemas.microsoft.com/office/drawing/2014/main" id="{A938412B-3321-4788-B48A-2CCB9060E87D}"/>
               </a:ext>
             </a:extLst>
           </p:cNvPr>
@@ -9239,7 +9177,7 @@
           <p:cNvPr id="9" name="table-cell-140-1-0">
             <a:extLst xmlns:a="http://schemas.openxmlformats.org/drawingml/2006/main">
               <a:ext uri="{FF2B5EF4-FFF2-40B4-BE49-F238E27FC236}">
-                <a16:creationId xmlns:a16="http://schemas.microsoft.com/office/drawing/2014/main" id="{A8919E46-4418-44A8-9A56-0E4880A8F12C}"/>
+                <a16:creationId xmlns:a16="http://schemas.microsoft.com/office/drawing/2014/main" id="{694EF010-D34C-42A5-864D-940B53CD8DB2}"/>
               </a:ext>
             </a:extLst>
           </p:cNvPr>
@@ -9272,7 +9210,7 @@
           <p:cNvPr id="10" name="table-text-140-1-0">
             <a:extLst xmlns:a="http://schemas.openxmlformats.org/drawingml/2006/main">
               <a:ext uri="{FF2B5EF4-FFF2-40B4-BE49-F238E27FC236}">
-                <a16:creationId xmlns:a16="http://schemas.microsoft.com/office/drawing/2014/main" id="{4E5032F5-8AD3-45BB-83AD-A28EB7364312}"/>
+                <a16:creationId xmlns:a16="http://schemas.microsoft.com/office/drawing/2014/main" id="{49204746-F953-47A0-B3B4-D45901FD55C8}"/>
               </a:ext>
             </a:extLst>
           </p:cNvPr>
@@ -9334,7 +9272,7 @@
           <p:cNvPr id="11" name="table-cell-140-1-1">
             <a:extLst xmlns:a="http://schemas.openxmlformats.org/drawingml/2006/main">
               <a:ext uri="{FF2B5EF4-FFF2-40B4-BE49-F238E27FC236}">
-                <a16:creationId xmlns:a16="http://schemas.microsoft.com/office/drawing/2014/main" id="{9DED3E6A-284F-4E42-A512-F2EA8F4CFB88}"/>
+                <a16:creationId xmlns:a16="http://schemas.microsoft.com/office/drawing/2014/main" id="{AECCBD02-3CBD-4FCA-9671-6A34D17F5E92}"/>
               </a:ext>
             </a:extLst>
           </p:cNvPr>
@@ -9367,7 +9305,7 @@
           <p:cNvPr id="12" name="table-text-140-1-1">
             <a:extLst xmlns:a="http://schemas.openxmlformats.org/drawingml/2006/main">
               <a:ext uri="{FF2B5EF4-FFF2-40B4-BE49-F238E27FC236}">
-                <a16:creationId xmlns:a16="http://schemas.microsoft.com/office/drawing/2014/main" id="{A66A4B3E-39AD-44C7-BDF6-2EA90B9C80FA}"/>
+                <a16:creationId xmlns:a16="http://schemas.microsoft.com/office/drawing/2014/main" id="{8D061774-D5C5-422D-9905-C3B3CB8E4094}"/>
               </a:ext>
             </a:extLst>
           </p:cNvPr>
@@ -9429,7 +9367,7 @@
           <p:cNvPr id="13" name="table-cell-140-2-0">
             <a:extLst xmlns:a="http://schemas.openxmlformats.org/drawingml/2006/main">
               <a:ext uri="{FF2B5EF4-FFF2-40B4-BE49-F238E27FC236}">
-                <a16:creationId xmlns:a16="http://schemas.microsoft.com/office/drawing/2014/main" id="{84314D56-79D4-4E5E-8AB1-98451AC950C5}"/>
+                <a16:creationId xmlns:a16="http://schemas.microsoft.com/office/drawing/2014/main" id="{89C7F468-59AC-450A-9EE7-2CC7418CB995}"/>
               </a:ext>
             </a:extLst>
           </p:cNvPr>
@@ -9462,7 +9400,7 @@
           <p:cNvPr id="14" name="table-text-140-2-0">
             <a:extLst xmlns:a="http://schemas.openxmlformats.org/drawingml/2006/main">
               <a:ext uri="{FF2B5EF4-FFF2-40B4-BE49-F238E27FC236}">
-                <a16:creationId xmlns:a16="http://schemas.microsoft.com/office/drawing/2014/main" id="{5C50A852-A2D6-40D2-B5C3-FA8D8830098F}"/>
+                <a16:creationId xmlns:a16="http://schemas.microsoft.com/office/drawing/2014/main" id="{923D5E30-AA60-45F7-B58F-A8E680E22CD8}"/>
               </a:ext>
             </a:extLst>
           </p:cNvPr>
@@ -9524,7 +9462,7 @@
           <p:cNvPr id="15" name="table-cell-140-2-1">
             <a:extLst xmlns:a="http://schemas.openxmlformats.org/drawingml/2006/main">
               <a:ext uri="{FF2B5EF4-FFF2-40B4-BE49-F238E27FC236}">
-                <a16:creationId xmlns:a16="http://schemas.microsoft.com/office/drawing/2014/main" id="{32F3A0E4-0590-4791-A4E7-3C24A90B3CE9}"/>
+                <a16:creationId xmlns:a16="http://schemas.microsoft.com/office/drawing/2014/main" id="{303FEA78-2977-4DAB-B93D-D4A5217A9987}"/>
               </a:ext>
             </a:extLst>
           </p:cNvPr>
@@ -9557,7 +9495,7 @@
           <p:cNvPr id="16" name="table-text-140-2-1">
             <a:extLst xmlns:a="http://schemas.openxmlformats.org/drawingml/2006/main">
               <a:ext uri="{FF2B5EF4-FFF2-40B4-BE49-F238E27FC236}">
-                <a16:creationId xmlns:a16="http://schemas.microsoft.com/office/drawing/2014/main" id="{052DEA45-A3AF-4C4F-8DC5-449A4129759D}"/>
+                <a16:creationId xmlns:a16="http://schemas.microsoft.com/office/drawing/2014/main" id="{CAC34330-E870-4CF5-BF82-9522F94CE36F}"/>
               </a:ext>
             </a:extLst>
           </p:cNvPr>
@@ -9619,7 +9557,7 @@
           <p:cNvPr id="17" name="table-cell-140-3-0">
             <a:extLst xmlns:a="http://schemas.openxmlformats.org/drawingml/2006/main">
               <a:ext uri="{FF2B5EF4-FFF2-40B4-BE49-F238E27FC236}">
-                <a16:creationId xmlns:a16="http://schemas.microsoft.com/office/drawing/2014/main" id="{557573DA-707B-40BA-9EF6-F6A877796E68}"/>
+                <a16:creationId xmlns:a16="http://schemas.microsoft.com/office/drawing/2014/main" id="{B91B53B7-4D7C-4D73-8186-362C241FCFA6}"/>
               </a:ext>
             </a:extLst>
           </p:cNvPr>
@@ -9652,7 +9590,7 @@
           <p:cNvPr id="18" name="table-text-140-3-0">
             <a:extLst xmlns:a="http://schemas.openxmlformats.org/drawingml/2006/main">
               <a:ext uri="{FF2B5EF4-FFF2-40B4-BE49-F238E27FC236}">
-                <a16:creationId xmlns:a16="http://schemas.microsoft.com/office/drawing/2014/main" id="{65A40354-B7EB-47B6-80D4-D44799EDA37B}"/>
+                <a16:creationId xmlns:a16="http://schemas.microsoft.com/office/drawing/2014/main" id="{18B4C1EC-366F-442B-8672-F4CE0EB1DE74}"/>
               </a:ext>
             </a:extLst>
           </p:cNvPr>
@@ -9714,7 +9652,7 @@
           <p:cNvPr id="19" name="table-cell-140-3-1">
             <a:extLst xmlns:a="http://schemas.openxmlformats.org/drawingml/2006/main">
               <a:ext uri="{FF2B5EF4-FFF2-40B4-BE49-F238E27FC236}">
-                <a16:creationId xmlns:a16="http://schemas.microsoft.com/office/drawing/2014/main" id="{D2AE5881-B657-4D73-A430-975AE51934C9}"/>
+                <a16:creationId xmlns:a16="http://schemas.microsoft.com/office/drawing/2014/main" id="{9B4A3537-DC76-4D4A-85F9-36FAAD669EC6}"/>
               </a:ext>
             </a:extLst>
           </p:cNvPr>
@@ -9747,7 +9685,7 @@
           <p:cNvPr id="20" name="table-text-140-3-1">
             <a:extLst xmlns:a="http://schemas.openxmlformats.org/drawingml/2006/main">
               <a:ext uri="{FF2B5EF4-FFF2-40B4-BE49-F238E27FC236}">
-                <a16:creationId xmlns:a16="http://schemas.microsoft.com/office/drawing/2014/main" id="{02CC03B4-1305-4DFC-8B57-9C94B8CC7EB3}"/>
+                <a16:creationId xmlns:a16="http://schemas.microsoft.com/office/drawing/2014/main" id="{9B621B99-A41E-4521-AAEA-0333A63F1088}"/>
               </a:ext>
             </a:extLst>
           </p:cNvPr>
@@ -9809,7 +9747,7 @@
           <p:cNvPr id="21" name="table-cell-140-4-0">
             <a:extLst xmlns:a="http://schemas.openxmlformats.org/drawingml/2006/main">
               <a:ext uri="{FF2B5EF4-FFF2-40B4-BE49-F238E27FC236}">
-                <a16:creationId xmlns:a16="http://schemas.microsoft.com/office/drawing/2014/main" id="{A9035A91-9DA3-44FE-B026-53D9A19936E8}"/>
+                <a16:creationId xmlns:a16="http://schemas.microsoft.com/office/drawing/2014/main" id="{BF72CA01-4413-403A-BEAB-68013B970F97}"/>
               </a:ext>
             </a:extLst>
           </p:cNvPr>
@@ -9842,7 +9780,7 @@
           <p:cNvPr id="22" name="table-text-140-4-0">
             <a:extLst xmlns:a="http://schemas.openxmlformats.org/drawingml/2006/main">
               <a:ext uri="{FF2B5EF4-FFF2-40B4-BE49-F238E27FC236}">
-                <a16:creationId xmlns:a16="http://schemas.microsoft.com/office/drawing/2014/main" id="{DF9D8485-71A0-4510-B21E-08BCF3B1B9A1}"/>
+                <a16:creationId xmlns:a16="http://schemas.microsoft.com/office/drawing/2014/main" id="{A3D06179-B8E7-40D6-A39D-C572A629C615}"/>
               </a:ext>
             </a:extLst>
           </p:cNvPr>
@@ -9904,7 +9842,7 @@
           <p:cNvPr id="23" name="table-cell-140-4-1">
             <a:extLst xmlns:a="http://schemas.openxmlformats.org/drawingml/2006/main">
               <a:ext uri="{FF2B5EF4-FFF2-40B4-BE49-F238E27FC236}">
-                <a16:creationId xmlns:a16="http://schemas.microsoft.com/office/drawing/2014/main" id="{1E6B1C0D-28B4-44A8-B76D-FB73FCB1CF2D}"/>
+                <a16:creationId xmlns:a16="http://schemas.microsoft.com/office/drawing/2014/main" id="{C7C06608-8B6E-42A9-9872-930A79C37677}"/>
               </a:ext>
             </a:extLst>
           </p:cNvPr>
@@ -9937,7 +9875,7 @@
           <p:cNvPr id="24" name="table-text-140-4-1">
             <a:extLst xmlns:a="http://schemas.openxmlformats.org/drawingml/2006/main">
               <a:ext uri="{FF2B5EF4-FFF2-40B4-BE49-F238E27FC236}">
-                <a16:creationId xmlns:a16="http://schemas.microsoft.com/office/drawing/2014/main" id="{FE93694B-2F01-41DA-8501-EC8D273DDAFB}"/>
+                <a16:creationId xmlns:a16="http://schemas.microsoft.com/office/drawing/2014/main" id="{FDE4FA2A-95F6-48E8-A12F-56ACA4937081}"/>
               </a:ext>
             </a:extLst>
           </p:cNvPr>
@@ -9999,7 +9937,7 @@
           <p:cNvPr id="25" name="table-cell-140-5-0">
             <a:extLst xmlns:a="http://schemas.openxmlformats.org/drawingml/2006/main">
               <a:ext uri="{FF2B5EF4-FFF2-40B4-BE49-F238E27FC236}">
-                <a16:creationId xmlns:a16="http://schemas.microsoft.com/office/drawing/2014/main" id="{9AA7CA3D-54A4-4327-9348-A9B7897C100E}"/>
+                <a16:creationId xmlns:a16="http://schemas.microsoft.com/office/drawing/2014/main" id="{BEB148B1-B83C-47EC-8A31-6CEDE55E1B8E}"/>
               </a:ext>
             </a:extLst>
           </p:cNvPr>
@@ -10032,7 +9970,7 @@
           <p:cNvPr id="26" name="table-text-140-5-0">
             <a:extLst xmlns:a="http://schemas.openxmlformats.org/drawingml/2006/main">
               <a:ext uri="{FF2B5EF4-FFF2-40B4-BE49-F238E27FC236}">
-                <a16:creationId xmlns:a16="http://schemas.microsoft.com/office/drawing/2014/main" id="{C1003CE0-BBC0-4C8B-9B68-203A9D19E366}"/>
+                <a16:creationId xmlns:a16="http://schemas.microsoft.com/office/drawing/2014/main" id="{29A1B3CF-2258-41D4-A75C-3E1ACC31222E}"/>
               </a:ext>
             </a:extLst>
           </p:cNvPr>
@@ -10094,7 +10032,7 @@
           <p:cNvPr id="27" name="table-cell-140-5-1">
             <a:extLst xmlns:a="http://schemas.openxmlformats.org/drawingml/2006/main">
               <a:ext uri="{FF2B5EF4-FFF2-40B4-BE49-F238E27FC236}">
-                <a16:creationId xmlns:a16="http://schemas.microsoft.com/office/drawing/2014/main" id="{8D51B901-C630-422E-AFE3-E69FE71C4B7A}"/>
+                <a16:creationId xmlns:a16="http://schemas.microsoft.com/office/drawing/2014/main" id="{D5E917BE-F065-4740-AB4E-4923EBBA6E8B}"/>
               </a:ext>
             </a:extLst>
           </p:cNvPr>
@@ -10127,7 +10065,7 @@
           <p:cNvPr id="28" name="table-text-140-5-1">
             <a:extLst xmlns:a="http://schemas.openxmlformats.org/drawingml/2006/main">
               <a:ext uri="{FF2B5EF4-FFF2-40B4-BE49-F238E27FC236}">
-                <a16:creationId xmlns:a16="http://schemas.microsoft.com/office/drawing/2014/main" id="{7FBF4A94-980D-43D3-A494-7F02C79DA7C3}"/>
+                <a16:creationId xmlns:a16="http://schemas.microsoft.com/office/drawing/2014/main" id="{E7C5B0C2-972D-4981-846F-8B8D8AA2EE44}"/>
               </a:ext>
             </a:extLst>
           </p:cNvPr>
@@ -10187,7 +10125,7 @@
     </p:spTree>
     <p:extLst>
       <p:ext uri="{BB962C8B-B14F-4D97-AF65-F5344CB8AC3E}">
-        <p14:creationId xmlns:p14="http://schemas.microsoft.com/office/powerpoint/2010/main" val="554152409"/>
+        <p14:creationId xmlns:p14="http://schemas.microsoft.com/office/powerpoint/2010/main" val="294211476"/>
       </p:ext>
     </p:extLst>
   </p:cSld>
@@ -10218,7 +10156,7 @@
           <p:cNvPr id="8" name="running-label">
             <a:extLst xmlns:a="http://schemas.openxmlformats.org/drawingml/2006/main">
               <a:ext uri="{FF2B5EF4-FFF2-40B4-BE49-F238E27FC236}">
-                <a16:creationId xmlns:a16="http://schemas.microsoft.com/office/drawing/2014/main" id="{E449E6E5-14FE-43BF-96C1-4FAE09BF5D7D}"/>
+                <a16:creationId xmlns:a16="http://schemas.microsoft.com/office/drawing/2014/main" id="{C3404155-111C-4029-B4E8-1156D0A59EF4}"/>
               </a:ext>
             </a:extLst>
           </p:cNvPr>
@@ -10280,7 +10218,7 @@
           <p:cNvPr id="2" name="page-number">
             <a:extLst xmlns:a="http://schemas.openxmlformats.org/drawingml/2006/main">
               <a:ext uri="{FF2B5EF4-FFF2-40B4-BE49-F238E27FC236}">
-                <a16:creationId xmlns:a16="http://schemas.microsoft.com/office/drawing/2014/main" id="{5B7288FF-5F06-4547-B6D0-084BFCDB4215}"/>
+                <a16:creationId xmlns:a16="http://schemas.microsoft.com/office/drawing/2014/main" id="{F9CA3BAC-917E-4573-95CB-80C57EF5EA64}"/>
               </a:ext>
             </a:extLst>
           </p:cNvPr>
@@ -10342,7 +10280,7 @@
           <p:cNvPr id="3" name="header-rule">
             <a:extLst xmlns:a="http://schemas.openxmlformats.org/drawingml/2006/main">
               <a:ext uri="{FF2B5EF4-FFF2-40B4-BE49-F238E27FC236}">
-                <a16:creationId xmlns:a16="http://schemas.microsoft.com/office/drawing/2014/main" id="{7B3A872A-A811-4C71-B70A-2E6ACCEEFE18}"/>
+                <a16:creationId xmlns:a16="http://schemas.microsoft.com/office/drawing/2014/main" id="{8837AB13-76BD-40C8-BF22-E1D45F5FECF4}"/>
               </a:ext>
             </a:extLst>
           </p:cNvPr>
@@ -10373,7 +10311,7 @@
           <p:cNvPr id="4" name="slide-title">
             <a:extLst xmlns:a="http://schemas.openxmlformats.org/drawingml/2006/main">
               <a:ext uri="{FF2B5EF4-FFF2-40B4-BE49-F238E27FC236}">
-                <a16:creationId xmlns:a16="http://schemas.microsoft.com/office/drawing/2014/main" id="{5C8447C5-3884-4141-B2CC-636D8FE8EFDB}"/>
+                <a16:creationId xmlns:a16="http://schemas.microsoft.com/office/drawing/2014/main" id="{EC0F5752-295A-467F-9BE6-A8C219C8A16C}"/>
               </a:ext>
             </a:extLst>
           </p:cNvPr>
@@ -10435,7 +10373,7 @@
           <p:cNvPr id="5" name="bullets-140">
             <a:extLst xmlns:a="http://schemas.openxmlformats.org/drawingml/2006/main">
               <a:ext uri="{FF2B5EF4-FFF2-40B4-BE49-F238E27FC236}">
-                <a16:creationId xmlns:a16="http://schemas.microsoft.com/office/drawing/2014/main" id="{DCE5DBC4-8776-41FB-B87C-4A424B76A143}"/>
+                <a16:creationId xmlns:a16="http://schemas.microsoft.com/office/drawing/2014/main" id="{75BC3BE3-2404-4762-BCB4-E07070A3E1E9}"/>
               </a:ext>
             </a:extLst>
           </p:cNvPr>
@@ -10594,7 +10532,7 @@
           <p:nvPr/>
         </p:nvPicPr>
         <p:blipFill>
-          <a:blip xmlns:r="http://schemas.openxmlformats.org/officeDocument/2006/relationships" xmlns:a="http://schemas.openxmlformats.org/drawingml/2006/main" r:embed="R65fa1550ef5c47e4"/>
+          <a:blip xmlns:r="http://schemas.openxmlformats.org/officeDocument/2006/relationships" xmlns:a="http://schemas.openxmlformats.org/drawingml/2006/main" r:embed="Rabd72d4c2fb04a8b"/>
           <a:stretch xmlns:a="http://schemas.openxmlformats.org/drawingml/2006/main"/>
         </p:blipFill>
         <p:spPr>
@@ -10614,7 +10552,7 @@
           <p:cNvPr id="7" name="image-caption-303.28">
             <a:extLst xmlns:a="http://schemas.openxmlformats.org/drawingml/2006/main">
               <a:ext uri="{FF2B5EF4-FFF2-40B4-BE49-F238E27FC236}">
-                <a16:creationId xmlns:a16="http://schemas.microsoft.com/office/drawing/2014/main" id="{3E8A90AD-AFD2-48FF-A489-849F8D5330C6}"/>
+                <a16:creationId xmlns:a16="http://schemas.microsoft.com/office/drawing/2014/main" id="{9509724F-A970-4AAA-907C-7D37AB59EFA8}"/>
               </a:ext>
             </a:extLst>
           </p:cNvPr>
@@ -10674,7 +10612,7 @@
     </p:spTree>
     <p:extLst>
       <p:ext uri="{BB962C8B-B14F-4D97-AF65-F5344CB8AC3E}">
-        <p14:creationId xmlns:p14="http://schemas.microsoft.com/office/powerpoint/2010/main" val="1947198297"/>
+        <p14:creationId xmlns:p14="http://schemas.microsoft.com/office/powerpoint/2010/main" val="368525463"/>
       </p:ext>
     </p:extLst>
   </p:cSld>
